--- a/public/slides/WAGademy-impact-planning-and-tracking.pptx
+++ b/public/slides/WAGademy-impact-planning-and-tracking.pptx
@@ -4,6 +4,9 @@
   <p:sldMasterIdLst>
     <p:sldMasterId id="2147483648" r:id="rId1"/>
   </p:sldMasterIdLst>
+  <p:notesMasterIdLst>
+    <p:notesMasterId r:id="rId9"/>
+  </p:notesMasterIdLst>
   <p:sldIdLst>
     <p:sldId id="256" r:id="rId2"/>
     <p:sldId id="257" r:id="rId3"/>
@@ -13,9 +16,6 @@
     <p:sldId id="261" r:id="rId7"/>
     <p:sldId id="262" r:id="rId8"/>
   </p:sldIdLst>
-  <p:notesMasterIdLst>
-    <p:notesMasterId r:id="rId9"/>
-  </p:notesMasterIdLst>
   <p:sldSz cx="12192000" cy="6858000"/>
   <p:notesSz cx="6858000" cy="12192000"/>
   <p:defaultTextStyle>
@@ -110,6 +110,11 @@
       </a:defRPr>
     </a:lvl9pPr>
   </p:defaultTextStyle>
+  <p:extLst>
+    <p:ext uri="{EFAFB233-063F-42B5-8137-9DF3F51BA10A}">
+      <p15:sldGuideLst xmlns:p15="http://schemas.microsoft.com/office/powerpoint/2012/main"/>
+    </p:ext>
+  </p:extLst>
 </p:presentation>
 </file>
 
@@ -135,234 +140,10 @@
           <a:chExt cx="0" cy="0"/>
         </a:xfrm>
       </p:grpSpPr>
-      <p:sp>
-        <p:nvSpPr>
-          <p:cNvPr id="2" name="Header Placeholder 1"/>
-          <p:cNvSpPr>
-            <a:spLocks noGrp="1"/>
-          </p:cNvSpPr>
-          <p:nvPr>
-            <p:ph type="hdr" sz="quarter"/>
-          </p:nvPr>
-        </p:nvSpPr>
-        <p:spPr>
-          <a:xfrm>
-            <a:off x="0" y="0"/>
-            <a:ext cx="2971800" cy="458788"/>
-          </a:xfrm>
-          <a:prstGeom prst="rect">
-            <a:avLst/>
-          </a:prstGeom>
-        </p:spPr>
-        <p:txBody>
-          <a:bodyPr vert="horz" lIns="91440" tIns="45720" rIns="91440" bIns="45720" rtlCol="0"/>
-          <a:lstStyle>
-            <a:lvl1pPr algn="l">
-              <a:defRPr sz="1200"/>
-            </a:lvl1pPr>
-          </a:lstStyle>
-          <a:p>
-            <a:endParaRPr lang="en-US"/>
-          </a:p>
-        </p:txBody>
-      </p:sp>
-      <p:sp>
-        <p:nvSpPr>
-          <p:cNvPr id="3" name="Date Placeholder 2"/>
-          <p:cNvSpPr>
-            <a:spLocks noGrp="1"/>
-          </p:cNvSpPr>
-          <p:nvPr>
-            <p:ph type="dt" idx="1"/>
-          </p:nvPr>
-        </p:nvSpPr>
-        <p:spPr>
-          <a:xfrm>
-            <a:off x="3884613" y="0"/>
-            <a:ext cx="2971800" cy="458788"/>
-          </a:xfrm>
-          <a:prstGeom prst="rect">
-            <a:avLst/>
-          </a:prstGeom>
-        </p:spPr>
-        <p:txBody>
-          <a:bodyPr vert="horz" lIns="91440" tIns="45720" rIns="91440" bIns="45720" rtlCol="0"/>
-          <a:lstStyle>
-            <a:lvl1pPr algn="r">
-              <a:defRPr sz="1200"/>
-            </a:lvl1pPr>
-          </a:lstStyle>
-          <a:p>
-            <a:fld id="{5282F153-3F37-0F45-9E97-73ACFA13230C}" type="datetimeFigureOut">
-              <a:rPr lang="en-US"/>
-              <a:t>7/23/19</a:t>
-            </a:fld>
-            <a:endParaRPr lang="en-US"/>
-          </a:p>
-        </p:txBody>
-      </p:sp>
-      <p:sp>
-        <p:nvSpPr>
-          <p:cNvPr id="4" name="Slide Image Placeholder 3"/>
-          <p:cNvSpPr>
-            <a:spLocks noGrp="1" noRot="1" noChangeAspect="1"/>
-          </p:cNvSpPr>
-          <p:nvPr>
-            <p:ph type="sldImg" idx="2"/>
-          </p:nvPr>
-        </p:nvSpPr>
-        <p:spPr>
-          <a:xfrm>
-            <a:off x="685800" y="1143000"/>
-            <a:ext cx="5486400" cy="3086100"/>
-          </a:xfrm>
-          <a:prstGeom prst="rect">
-            <a:avLst/>
-          </a:prstGeom>
-          <a:noFill/>
-          <a:ln w="12700">
-            <a:solidFill>
-              <a:prstClr val="black"/>
-            </a:solidFill>
-          </a:ln>
-        </p:spPr>
-        <p:txBody>
-          <a:bodyPr vert="horz" lIns="91440" tIns="45720" rIns="91440" bIns="45720" rtlCol="0" anchor="ctr"/>
-          <a:lstStyle/>
-          <a:p>
-            <a:endParaRPr lang="en-US"/>
-          </a:p>
-        </p:txBody>
-      </p:sp>
-      <p:sp>
-        <p:nvSpPr>
-          <p:cNvPr id="5" name="Notes Placeholder 4"/>
-          <p:cNvSpPr>
-            <a:spLocks noGrp="1"/>
-          </p:cNvSpPr>
-          <p:nvPr>
-            <p:ph type="body" sz="quarter" idx="3"/>
-          </p:nvPr>
-        </p:nvSpPr>
-        <p:spPr>
-          <a:xfrm>
-            <a:off x="685800" y="4400550"/>
-            <a:ext cx="5486400" cy="3600450"/>
-          </a:xfrm>
-          <a:prstGeom prst="rect">
-            <a:avLst/>
-          </a:prstGeom>
-        </p:spPr>
-        <p:txBody>
-          <a:bodyPr vert="horz" lIns="91440" tIns="45720" rIns="91440" bIns="45720" rtlCol="0"/>
-          <a:lstStyle/>
-          <a:p>
-            <a:pPr lvl="0"/>
-            <a:r>
-              <a:rPr lang="en-US"/>
-              <a:t>Click to edit Master text styles</a:t>
-            </a:r>
-          </a:p>
-          <a:p>
-            <a:pPr lvl="1"/>
-            <a:r>
-              <a:rPr lang="en-US"/>
-              <a:t>Second level</a:t>
-            </a:r>
-          </a:p>
-          <a:p>
-            <a:pPr lvl="2"/>
-            <a:r>
-              <a:rPr lang="en-US"/>
-              <a:t>Third level</a:t>
-            </a:r>
-          </a:p>
-          <a:p>
-            <a:pPr lvl="3"/>
-            <a:r>
-              <a:rPr lang="en-US"/>
-              <a:t>Fourth level</a:t>
-            </a:r>
-          </a:p>
-          <a:p>
-            <a:pPr lvl="4"/>
-            <a:r>
-              <a:rPr lang="en-US"/>
-              <a:t>Fifth level</a:t>
-            </a:r>
-          </a:p>
-        </p:txBody>
-      </p:sp>
-      <p:sp>
-        <p:nvSpPr>
-          <p:cNvPr id="6" name="Footer Placeholder 5"/>
-          <p:cNvSpPr>
-            <a:spLocks noGrp="1"/>
-          </p:cNvSpPr>
-          <p:nvPr>
-            <p:ph type="ftr" sz="quarter" idx="4"/>
-          </p:nvPr>
-        </p:nvSpPr>
-        <p:spPr>
-          <a:xfrm>
-            <a:off x="0" y="8685213"/>
-            <a:ext cx="2971800" cy="458787"/>
-          </a:xfrm>
-          <a:prstGeom prst="rect">
-            <a:avLst/>
-          </a:prstGeom>
-        </p:spPr>
-        <p:txBody>
-          <a:bodyPr vert="horz" lIns="91440" tIns="45720" rIns="91440" bIns="45720" rtlCol="0" anchor="b"/>
-          <a:lstStyle>
-            <a:lvl1pPr algn="l">
-              <a:defRPr sz="1200"/>
-            </a:lvl1pPr>
-          </a:lstStyle>
-          <a:p>
-            <a:endParaRPr lang="en-US"/>
-          </a:p>
-        </p:txBody>
-      </p:sp>
-      <p:sp>
-        <p:nvSpPr>
-          <p:cNvPr id="7" name="Slide Number Placeholder 6"/>
-          <p:cNvSpPr>
-            <a:spLocks noGrp="1"/>
-          </p:cNvSpPr>
-          <p:nvPr>
-            <p:ph type="sldNum" sz="quarter" idx="5"/>
-          </p:nvPr>
-        </p:nvSpPr>
-        <p:spPr>
-          <a:xfrm>
-            <a:off x="3884613" y="8685213"/>
-            <a:ext cx="2971800" cy="458787"/>
-          </a:xfrm>
-          <a:prstGeom prst="rect">
-            <a:avLst/>
-          </a:prstGeom>
-        </p:spPr>
-        <p:txBody>
-          <a:bodyPr vert="horz" lIns="91440" tIns="45720" rIns="91440" bIns="45720" rtlCol="0" anchor="b"/>
-          <a:lstStyle>
-            <a:lvl1pPr algn="r">
-              <a:defRPr sz="1200"/>
-            </a:lvl1pPr>
-          </a:lstStyle>
-          <a:p>
-            <a:fld id="{CE5E9CC1-C706-0F49-92D6-E571CC5EEA8F}" type="slidenum">
-              <a:rPr lang="en-US"/>
-              <a:t>‹#›</a:t>
-            </a:fld>
-            <a:endParaRPr lang="en-US"/>
-          </a:p>
-        </p:txBody>
-      </p:sp>
     </p:spTree>
     <p:extLst>
       <p:ext uri="{BB962C8B-B14F-4D97-AF65-F5344CB8AC3E}">
-        <p14:creationId xmlns:p14="http://schemas.microsoft.com/office/powerpoint/2010/main" val="1024086991"/>
+        <p14:creationId xmlns:p14="http://schemas.microsoft.com/office/powerpoint/2010/main" val="2699912534"/>
       </p:ext>
     </p:extLst>
   </p:cSld>
@@ -510,7 +291,6 @@
               <a:rPr lang="en-US" dirty="0"/>
               <a:t>Open by asking who has already been asked for an "impact statement" and what they wrote. Set the frame early: we are not here to inflate anything. Most of this session is about noticing and recording impact that is already happening, plus a one-time setup job. Confidentiality is not an issue today, but candour about metrics anxiety is welcome.</a:t>
             </a:r>
-            <a:endParaRPr lang="en-US" dirty="0"/>
           </a:p>
         </p:txBody>
       </p:sp>
@@ -598,7 +378,6 @@
               <a:rPr lang="en-US" dirty="0"/>
               <a:t>Ten minutes of open discussion, five to land the reframe. Do not let it become a round of people listing their publications. Steer toward: who is this work actually for, and what would have to change for it to count? Expect at least one person to say "my supervisor said to just get papers out" — that is the tension the rest of the session addresses.</a:t>
             </a:r>
-            <a:endParaRPr lang="en-US" dirty="0"/>
           </a:p>
         </p:txBody>
       </p:sp>
@@ -686,7 +465,6 @@
               <a:rPr lang="en-US" dirty="0"/>
               <a:t>The trap to name out loud: because the left column is countable and the right is not, people report the left and talk about it as if it were the right. Everyone on a panel knows the difference. Being precise about which one you are claiming reads as competence, not modesty.</a:t>
             </a:r>
-            <a:endParaRPr lang="en-US" dirty="0"/>
           </a:p>
         </p:txBody>
       </p:sp>
@@ -774,7 +552,6 @@
               <a:rPr lang="en-US" dirty="0"/>
               <a:t>Walk the chain left to right once, slowly. The honest landing point for most people in the room is the amber box, with a sketched arrow toward one of the green ones. For an ISB audience the usual answer is Knowledge now, Health later — and being specific about the "later" is what separates a good impact statement from a vague one.</a:t>
             </a:r>
-            <a:endParaRPr lang="en-US" dirty="0"/>
           </a:p>
         </p:txBody>
       </p:sp>
@@ -862,7 +639,6 @@
               <a:rPr lang="en-US" dirty="0"/>
               <a:t>Do not read the table aloud. Pick two rows: the h-index (because everyone quotes it and few can define it) and the journal impact factor (because using it to describe your own paper is the single most common self-inflicted wound). The three rules on the right are the takeaway — if people remember nothing else, that is enough.</a:t>
             </a:r>
-            <a:endParaRPr lang="en-US" dirty="0"/>
           </a:p>
         </p:txBody>
       </p:sp>
@@ -950,7 +726,6 @@
               <a:rPr lang="en-US" dirty="0"/>
               <a:t>This is the slide that actually pays off, and it is the least glamorous. Emphasise: you are not manufacturing anything, you are noticing what already happened. Ask the room who has ever had to reconstruct a CV section from memory — the hands go up. Point at the six columns and say it fits on one screen.</a:t>
             </a:r>
-            <a:endParaRPr lang="en-US" dirty="0"/>
           </a:p>
         </p:txBody>
       </p:sp>
@@ -1038,7 +813,6 @@
               <a:rPr lang="en-US" dirty="0"/>
               <a:t>Give them the full thirty minutes and treat step 1 as the pomodoro-one objective for anyone who has not done it. Have orcid.org open on the screen. Say plainly: this is a one-time administrative job that nobody regrets and everybody postpones. Then move straight into goal setting so the session does not lose momentum.</a:t>
             </a:r>
-            <a:endParaRPr lang="en-US" dirty="0"/>
           </a:p>
         </p:txBody>
       </p:sp>
@@ -1111,6 +885,11 @@
 <file path=ppt/slideMasters/slideMaster1.xml><?xml version="1.0" encoding="utf-8"?>
 <p:sldMaster xmlns:a="http://schemas.openxmlformats.org/drawingml/2006/main" xmlns:r="http://schemas.openxmlformats.org/officeDocument/2006/relationships" xmlns:p="http://schemas.openxmlformats.org/presentationml/2006/main">
   <p:cSld>
+    <p:bg>
+      <p:bgRef idx="1001">
+        <a:schemeClr val="bg1"/>
+      </p:bgRef>
+    </p:bg>
     <p:spTree>
       <p:nvGrpSpPr>
         <p:cNvPr id="1" name=""/>
@@ -1393,6 +1172,7 @@
         <a:solidFill>
           <a:srgbClr val="123A2D"/>
         </a:solidFill>
+        <a:effectLst/>
       </p:bgPr>
     </p:bg>
     <p:spTree>
@@ -1428,17 +1208,24 @@
           </a:solidFill>
           <a:ln/>
         </p:spPr>
+        <p:txBody>
+          <a:bodyPr/>
+          <a:lstStyle/>
+          <a:p>
+            <a:endParaRPr lang="en-AU"/>
+          </a:p>
+        </p:txBody>
       </p:sp>
       <p:pic>
         <p:nvPicPr>
-          <p:cNvPr id="3" name="Image 0" descr="preencoded.png">    </p:cNvPr>
+          <p:cNvPr id="3" name="Image 0" descr="preencoded.png"/>
           <p:cNvPicPr>
             <a:picLocks noChangeAspect="1"/>
           </p:cNvPicPr>
           <p:nvPr/>
         </p:nvPicPr>
         <p:blipFill>
-          <a:blip r:embed="rId1"/>
+          <a:blip r:embed="rId3"/>
           <a:stretch>
             <a:fillRect/>
           </a:stretch>
@@ -1474,11 +1261,11 @@
           <a:bodyPr wrap="square" lIns="0" tIns="0" rIns="0" bIns="0" rtlCol="0" anchor="ctr"/>
           <a:lstStyle/>
           <a:p>
-            <a:pPr indent="0" marL="0">
-              <a:buNone/>
-            </a:pPr>
-            <a:r>
-              <a:rPr lang="en-US" sz="1200" b="1" spc="200" kern="0" dirty="0">
+            <a:pPr marL="0" indent="0">
+              <a:buNone/>
+            </a:pPr>
+            <a:r>
+              <a:rPr lang="en-US" sz="1200" b="1" kern="0" spc="200" dirty="0">
                 <a:solidFill>
                   <a:srgbClr val="F0B050"/>
                 </a:solidFill>
@@ -1513,7 +1300,7 @@
           <a:bodyPr wrap="square" lIns="0" tIns="0" rIns="0" bIns="0" rtlCol="0" anchor="ctr"/>
           <a:lstStyle/>
           <a:p>
-            <a:pPr indent="0" marL="0">
+            <a:pPr marL="0" indent="0">
               <a:buNone/>
             </a:pPr>
             <a:r>
@@ -1552,7 +1339,7 @@
           <a:bodyPr wrap="square" lIns="0" tIns="0" rIns="0" bIns="0" rtlCol="0" anchor="ctr"/>
           <a:lstStyle/>
           <a:p>
-            <a:pPr indent="0" marL="0">
+            <a:pPr marL="0" indent="0">
               <a:lnSpc>
                 <a:spcPts val="2800"/>
               </a:lnSpc>
@@ -1572,7 +1359,7 @@
             <a:endParaRPr lang="en-US" sz="2000" dirty="0"/>
           </a:p>
           <a:p>
-            <a:pPr indent="0" marL="0">
+            <a:pPr marL="0" indent="0">
               <a:lnSpc>
                 <a:spcPts val="2800"/>
               </a:lnSpc>
@@ -1615,6 +1402,13 @@
             <a:prstDash val="solid"/>
           </a:ln>
         </p:spPr>
+        <p:txBody>
+          <a:bodyPr/>
+          <a:lstStyle/>
+          <a:p>
+            <a:endParaRPr lang="en-AU"/>
+          </a:p>
+        </p:txBody>
       </p:sp>
       <p:sp>
         <p:nvSpPr>
@@ -1637,7 +1431,7 @@
           <a:bodyPr wrap="square" lIns="0" tIns="0" rIns="0" bIns="0" rtlCol="0" anchor="ctr"/>
           <a:lstStyle/>
           <a:p>
-            <a:pPr indent="0" marL="0">
+            <a:pPr marL="0" indent="0">
               <a:buNone/>
             </a:pPr>
             <a:r>
@@ -1649,7 +1443,7 @@
                 <a:ea typeface="Calibri" pitchFamily="34" charset="-122"/>
                 <a:cs typeface="Calibri" pitchFamily="34" charset="-120"/>
               </a:rPr>
-              <a:t>Topic · 40 min read + 30 min exercise · goal setting straight after</a:t>
+              <a:t>Topic · 40 min read + 30 min exercise</a:t>
             </a:r>
             <a:endParaRPr lang="en-US" sz="1400" dirty="0"/>
           </a:p>
@@ -1674,6 +1468,13 @@
           </a:solidFill>
           <a:ln/>
         </p:spPr>
+        <p:txBody>
+          <a:bodyPr/>
+          <a:lstStyle/>
+          <a:p>
+            <a:endParaRPr lang="en-AU"/>
+          </a:p>
+        </p:txBody>
       </p:sp>
       <p:sp>
         <p:nvSpPr>
@@ -1696,7 +1497,7 @@
           <a:bodyPr wrap="square" lIns="0" tIns="0" rIns="0" bIns="0" rtlCol="0" anchor="ctr"/>
           <a:lstStyle/>
           <a:p>
-            <a:pPr indent="0" marL="0">
+            <a:pPr marL="0" indent="0">
               <a:buNone/>
             </a:pPr>
             <a:r>
@@ -1735,7 +1536,7 @@
           <a:bodyPr wrap="square" lIns="0" tIns="0" rIns="0" bIns="0" rtlCol="0" anchor="ctr"/>
           <a:lstStyle/>
           <a:p>
-            <a:pPr indent="0" marL="0">
+            <a:pPr marL="0" indent="0">
               <a:buNone/>
             </a:pPr>
             <a:r>
@@ -1772,6 +1573,13 @@
           </a:solidFill>
           <a:ln/>
         </p:spPr>
+        <p:txBody>
+          <a:bodyPr/>
+          <a:lstStyle/>
+          <a:p>
+            <a:endParaRPr lang="en-AU"/>
+          </a:p>
+        </p:txBody>
       </p:sp>
       <p:sp>
         <p:nvSpPr>
@@ -1794,7 +1602,7 @@
           <a:bodyPr wrap="square" lIns="0" tIns="0" rIns="0" bIns="0" rtlCol="0" anchor="ctr"/>
           <a:lstStyle/>
           <a:p>
-            <a:pPr indent="0" marL="0">
+            <a:pPr marL="0" indent="0">
               <a:buNone/>
             </a:pPr>
             <a:r>
@@ -1833,7 +1641,7 @@
           <a:bodyPr wrap="square" lIns="0" tIns="0" rIns="0" bIns="0" rtlCol="0" anchor="ctr"/>
           <a:lstStyle/>
           <a:p>
-            <a:pPr indent="0" marL="0">
+            <a:pPr marL="0" indent="0">
               <a:buNone/>
             </a:pPr>
             <a:r>
@@ -1870,6 +1678,13 @@
           </a:solidFill>
           <a:ln/>
         </p:spPr>
+        <p:txBody>
+          <a:bodyPr/>
+          <a:lstStyle/>
+          <a:p>
+            <a:endParaRPr lang="en-AU"/>
+          </a:p>
+        </p:txBody>
       </p:sp>
       <p:sp>
         <p:nvSpPr>
@@ -1892,7 +1707,7 @@
           <a:bodyPr wrap="square" lIns="0" tIns="0" rIns="0" bIns="0" rtlCol="0" anchor="ctr"/>
           <a:lstStyle/>
           <a:p>
-            <a:pPr indent="0" marL="0">
+            <a:pPr marL="0" indent="0">
               <a:buNone/>
             </a:pPr>
             <a:r>
@@ -1931,7 +1746,7 @@
           <a:bodyPr wrap="square" lIns="0" tIns="0" rIns="0" bIns="0" rtlCol="0" anchor="ctr"/>
           <a:lstStyle/>
           <a:p>
-            <a:pPr indent="0" marL="0">
+            <a:pPr marL="0" indent="0">
               <a:buNone/>
             </a:pPr>
             <a:r>
@@ -1965,6 +1780,7 @@
         <a:solidFill>
           <a:srgbClr val="FAF3E8"/>
         </a:solidFill>
+        <a:effectLst/>
       </p:bgPr>
     </p:bg>
     <p:spTree>
@@ -2002,11 +1818,11 @@
           <a:bodyPr wrap="square" lIns="0" tIns="0" rIns="0" bIns="0" rtlCol="0" anchor="ctr"/>
           <a:lstStyle/>
           <a:p>
-            <a:pPr indent="0" marL="0">
-              <a:buNone/>
-            </a:pPr>
-            <a:r>
-              <a:rPr lang="en-US" sz="1100" b="1" spc="200" kern="0" dirty="0">
+            <a:pPr marL="0" indent="0">
+              <a:buNone/>
+            </a:pPr>
+            <a:r>
+              <a:rPr lang="en-US" sz="1100" b="1" kern="0" spc="200" dirty="0">
                 <a:solidFill>
                   <a:srgbClr val="0E8C6A"/>
                 </a:solidFill>
@@ -2041,7 +1857,7 @@
           <a:bodyPr wrap="square" lIns="0" tIns="0" rIns="0" bIns="0" rtlCol="0" anchor="ctr"/>
           <a:lstStyle/>
           <a:p>
-            <a:pPr algn="l" indent="0" marL="0">
+            <a:pPr marL="0" indent="0" algn="l">
               <a:buNone/>
             </a:pPr>
             <a:r>
@@ -2085,13 +1901,20 @@
             <a:prstDash val="solid"/>
           </a:ln>
           <a:effectLst>
-            <a:outerShdw sx="100000" sy="100000" kx="0" ky="0" algn="bl" rotWithShape="0" blurRad="76200" dist="12700" dir="5400000">
+            <a:outerShdw blurRad="76200" dist="12700" dir="5400000" algn="bl" rotWithShape="0">
               <a:srgbClr val="3B342B">
                 <a:alpha val="14000"/>
               </a:srgbClr>
             </a:outerShdw>
           </a:effectLst>
         </p:spPr>
+        <p:txBody>
+          <a:bodyPr/>
+          <a:lstStyle/>
+          <a:p>
+            <a:endParaRPr lang="en-AU"/>
+          </a:p>
+        </p:txBody>
       </p:sp>
       <p:sp>
         <p:nvSpPr>
@@ -2112,17 +1935,24 @@
           </a:solidFill>
           <a:ln/>
         </p:spPr>
+        <p:txBody>
+          <a:bodyPr/>
+          <a:lstStyle/>
+          <a:p>
+            <a:endParaRPr lang="en-AU"/>
+          </a:p>
+        </p:txBody>
       </p:sp>
       <p:pic>
         <p:nvPicPr>
-          <p:cNvPr id="6" name="Image 0" descr="preencoded.png">    </p:cNvPr>
+          <p:cNvPr id="6" name="Image 0" descr="preencoded.png"/>
           <p:cNvPicPr>
             <a:picLocks noChangeAspect="1"/>
           </p:cNvPicPr>
           <p:nvPr/>
         </p:nvPicPr>
         <p:blipFill>
-          <a:blip r:embed="rId1"/>
+          <a:blip r:embed="rId3"/>
           <a:stretch>
             <a:fillRect/>
           </a:stretch>
@@ -2158,7 +1988,7 @@
           <a:bodyPr wrap="square" lIns="0" tIns="0" rIns="0" bIns="0" rtlCol="0" anchor="ctr"/>
           <a:lstStyle/>
           <a:p>
-            <a:pPr indent="0" marL="0">
+            <a:pPr marL="0" indent="0">
               <a:buNone/>
             </a:pPr>
             <a:r>
@@ -2197,7 +2027,7 @@
           <a:bodyPr wrap="square" lIns="0" tIns="0" rIns="0" bIns="0" rtlCol="0" anchor="ctr"/>
           <a:lstStyle/>
           <a:p>
-            <a:pPr indent="0" marL="0">
+            <a:pPr marL="0" indent="0">
               <a:lnSpc>
                 <a:spcPts val="1900"/>
               </a:lnSpc>
@@ -2244,13 +2074,20 @@
             <a:prstDash val="solid"/>
           </a:ln>
           <a:effectLst>
-            <a:outerShdw sx="100000" sy="100000" kx="0" ky="0" algn="bl" rotWithShape="0" blurRad="76200" dist="12700" dir="5400000">
+            <a:outerShdw blurRad="76200" dist="12700" dir="5400000" algn="bl" rotWithShape="0">
               <a:srgbClr val="3B342B">
                 <a:alpha val="14000"/>
               </a:srgbClr>
             </a:outerShdw>
           </a:effectLst>
         </p:spPr>
+        <p:txBody>
+          <a:bodyPr/>
+          <a:lstStyle/>
+          <a:p>
+            <a:endParaRPr lang="en-AU"/>
+          </a:p>
+        </p:txBody>
       </p:sp>
       <p:sp>
         <p:nvSpPr>
@@ -2271,17 +2108,24 @@
           </a:solidFill>
           <a:ln/>
         </p:spPr>
+        <p:txBody>
+          <a:bodyPr/>
+          <a:lstStyle/>
+          <a:p>
+            <a:endParaRPr lang="en-AU"/>
+          </a:p>
+        </p:txBody>
       </p:sp>
       <p:pic>
         <p:nvPicPr>
-          <p:cNvPr id="11" name="Image 1" descr="preencoded.png">    </p:cNvPr>
+          <p:cNvPr id="11" name="Image 1" descr="preencoded.png"/>
           <p:cNvPicPr>
             <a:picLocks noChangeAspect="1"/>
           </p:cNvPicPr>
           <p:nvPr/>
         </p:nvPicPr>
         <p:blipFill>
-          <a:blip r:embed="rId2"/>
+          <a:blip r:embed="rId4"/>
           <a:stretch>
             <a:fillRect/>
           </a:stretch>
@@ -2317,7 +2161,7 @@
           <a:bodyPr wrap="square" lIns="0" tIns="0" rIns="0" bIns="0" rtlCol="0" anchor="ctr"/>
           <a:lstStyle/>
           <a:p>
-            <a:pPr indent="0" marL="0">
+            <a:pPr marL="0" indent="0">
               <a:buNone/>
             </a:pPr>
             <a:r>
@@ -2356,7 +2200,7 @@
           <a:bodyPr wrap="square" lIns="0" tIns="0" rIns="0" bIns="0" rtlCol="0" anchor="ctr"/>
           <a:lstStyle/>
           <a:p>
-            <a:pPr indent="0" marL="0">
+            <a:pPr marL="0" indent="0">
               <a:lnSpc>
                 <a:spcPts val="1900"/>
               </a:lnSpc>
@@ -2403,13 +2247,20 @@
             <a:prstDash val="solid"/>
           </a:ln>
           <a:effectLst>
-            <a:outerShdw sx="100000" sy="100000" kx="0" ky="0" algn="bl" rotWithShape="0" blurRad="76200" dist="12700" dir="5400000">
+            <a:outerShdw blurRad="76200" dist="12700" dir="5400000" algn="bl" rotWithShape="0">
               <a:srgbClr val="3B342B">
                 <a:alpha val="14000"/>
               </a:srgbClr>
             </a:outerShdw>
           </a:effectLst>
         </p:spPr>
+        <p:txBody>
+          <a:bodyPr/>
+          <a:lstStyle/>
+          <a:p>
+            <a:endParaRPr lang="en-AU"/>
+          </a:p>
+        </p:txBody>
       </p:sp>
       <p:sp>
         <p:nvSpPr>
@@ -2430,17 +2281,24 @@
           </a:solidFill>
           <a:ln/>
         </p:spPr>
+        <p:txBody>
+          <a:bodyPr/>
+          <a:lstStyle/>
+          <a:p>
+            <a:endParaRPr lang="en-AU"/>
+          </a:p>
+        </p:txBody>
       </p:sp>
       <p:pic>
         <p:nvPicPr>
-          <p:cNvPr id="16" name="Image 2" descr="preencoded.png">    </p:cNvPr>
+          <p:cNvPr id="16" name="Image 2" descr="preencoded.png"/>
           <p:cNvPicPr>
             <a:picLocks noChangeAspect="1"/>
           </p:cNvPicPr>
           <p:nvPr/>
         </p:nvPicPr>
         <p:blipFill>
-          <a:blip r:embed="rId3"/>
+          <a:blip r:embed="rId5"/>
           <a:stretch>
             <a:fillRect/>
           </a:stretch>
@@ -2476,7 +2334,7 @@
           <a:bodyPr wrap="square" lIns="0" tIns="0" rIns="0" bIns="0" rtlCol="0" anchor="ctr"/>
           <a:lstStyle/>
           <a:p>
-            <a:pPr indent="0" marL="0">
+            <a:pPr marL="0" indent="0">
               <a:buNone/>
             </a:pPr>
             <a:r>
@@ -2515,7 +2373,7 @@
           <a:bodyPr wrap="square" lIns="0" tIns="0" rIns="0" bIns="0" rtlCol="0" anchor="ctr"/>
           <a:lstStyle/>
           <a:p>
-            <a:pPr indent="0" marL="0">
+            <a:pPr marL="0" indent="0">
               <a:lnSpc>
                 <a:spcPts val="1900"/>
               </a:lnSpc>
@@ -2562,13 +2420,20 @@
             <a:prstDash val="solid"/>
           </a:ln>
           <a:effectLst>
-            <a:outerShdw sx="100000" sy="100000" kx="0" ky="0" algn="bl" rotWithShape="0" blurRad="76200" dist="12700" dir="5400000">
+            <a:outerShdw blurRad="76200" dist="12700" dir="5400000" algn="bl" rotWithShape="0">
               <a:srgbClr val="3B342B">
                 <a:alpha val="14000"/>
               </a:srgbClr>
             </a:outerShdw>
           </a:effectLst>
         </p:spPr>
+        <p:txBody>
+          <a:bodyPr/>
+          <a:lstStyle/>
+          <a:p>
+            <a:endParaRPr lang="en-AU"/>
+          </a:p>
+        </p:txBody>
       </p:sp>
       <p:sp>
         <p:nvSpPr>
@@ -2589,17 +2454,24 @@
           </a:solidFill>
           <a:ln/>
         </p:spPr>
+        <p:txBody>
+          <a:bodyPr/>
+          <a:lstStyle/>
+          <a:p>
+            <a:endParaRPr lang="en-AU"/>
+          </a:p>
+        </p:txBody>
       </p:sp>
       <p:pic>
         <p:nvPicPr>
-          <p:cNvPr id="21" name="Image 3" descr="preencoded.png">    </p:cNvPr>
+          <p:cNvPr id="21" name="Image 3" descr="preencoded.png"/>
           <p:cNvPicPr>
             <a:picLocks noChangeAspect="1"/>
           </p:cNvPicPr>
           <p:nvPr/>
         </p:nvPicPr>
         <p:blipFill>
-          <a:blip r:embed="rId4"/>
+          <a:blip r:embed="rId6"/>
           <a:stretch>
             <a:fillRect/>
           </a:stretch>
@@ -2635,7 +2507,7 @@
           <a:bodyPr wrap="square" lIns="0" tIns="0" rIns="0" bIns="0" rtlCol="0" anchor="ctr"/>
           <a:lstStyle/>
           <a:p>
-            <a:pPr indent="0" marL="0">
+            <a:pPr marL="0" indent="0">
               <a:buNone/>
             </a:pPr>
             <a:r>
@@ -2674,7 +2546,7 @@
           <a:bodyPr wrap="square" lIns="0" tIns="0" rIns="0" bIns="0" rtlCol="0" anchor="ctr"/>
           <a:lstStyle/>
           <a:p>
-            <a:pPr indent="0" marL="0">
+            <a:pPr marL="0" indent="0">
               <a:lnSpc>
                 <a:spcPts val="1900"/>
               </a:lnSpc>
@@ -2716,7 +2588,7 @@
           <a:bodyPr wrap="square" lIns="0" tIns="0" rIns="0" bIns="0" rtlCol="0" anchor="ctr"/>
           <a:lstStyle/>
           <a:p>
-            <a:pPr indent="0" marL="0">
+            <a:pPr marL="0" indent="0">
               <a:buNone/>
             </a:pPr>
             <a:r>
@@ -2750,6 +2622,7 @@
         <a:solidFill>
           <a:srgbClr val="FAF3E8"/>
         </a:solidFill>
+        <a:effectLst/>
       </p:bgPr>
     </p:bg>
     <p:spTree>
@@ -2787,11 +2660,11 @@
           <a:bodyPr wrap="square" lIns="0" tIns="0" rIns="0" bIns="0" rtlCol="0" anchor="ctr"/>
           <a:lstStyle/>
           <a:p>
-            <a:pPr indent="0" marL="0">
-              <a:buNone/>
-            </a:pPr>
-            <a:r>
-              <a:rPr lang="en-US" sz="1100" b="1" spc="200" kern="0" dirty="0">
+            <a:pPr marL="0" indent="0">
+              <a:buNone/>
+            </a:pPr>
+            <a:r>
+              <a:rPr lang="en-US" sz="1100" b="1" kern="0" spc="200" dirty="0">
                 <a:solidFill>
                   <a:srgbClr val="0E8C6A"/>
                 </a:solidFill>
@@ -2826,7 +2699,7 @@
           <a:bodyPr wrap="square" lIns="0" tIns="0" rIns="0" bIns="0" rtlCol="0" anchor="ctr"/>
           <a:lstStyle/>
           <a:p>
-            <a:pPr algn="l" indent="0" marL="0">
+            <a:pPr marL="0" indent="0" algn="l">
               <a:buNone/>
             </a:pPr>
             <a:r>
@@ -2870,13 +2743,20 @@
             <a:prstDash val="solid"/>
           </a:ln>
           <a:effectLst>
-            <a:outerShdw sx="100000" sy="100000" kx="0" ky="0" algn="bl" rotWithShape="0" blurRad="76200" dist="12700" dir="5400000">
+            <a:outerShdw blurRad="76200" dist="12700" dir="5400000" algn="bl" rotWithShape="0">
               <a:srgbClr val="3B342B">
                 <a:alpha val="14000"/>
               </a:srgbClr>
             </a:outerShdw>
           </a:effectLst>
         </p:spPr>
+        <p:txBody>
+          <a:bodyPr/>
+          <a:lstStyle/>
+          <a:p>
+            <a:endParaRPr lang="en-AU"/>
+          </a:p>
+        </p:txBody>
       </p:sp>
       <p:sp>
         <p:nvSpPr>
@@ -2897,6 +2777,13 @@
           </a:solidFill>
           <a:ln/>
         </p:spPr>
+        <p:txBody>
+          <a:bodyPr/>
+          <a:lstStyle/>
+          <a:p>
+            <a:endParaRPr lang="en-AU"/>
+          </a:p>
+        </p:txBody>
       </p:sp>
       <p:sp>
         <p:nvSpPr>
@@ -2919,7 +2806,7 @@
           <a:bodyPr wrap="square" lIns="0" tIns="0" rIns="0" bIns="0" rtlCol="0" anchor="ctr"/>
           <a:lstStyle/>
           <a:p>
-            <a:pPr indent="0" marL="0">
+            <a:pPr marL="0" indent="0">
               <a:buNone/>
             </a:pPr>
             <a:r>
@@ -3064,7 +2951,7 @@
           <a:bodyPr wrap="square" lIns="0" tIns="0" rIns="0" bIns="0" rtlCol="0" anchor="ctr"/>
           <a:lstStyle/>
           <a:p>
-            <a:pPr indent="0" marL="0">
+            <a:pPr marL="0" indent="0">
               <a:buNone/>
             </a:pPr>
             <a:r>
@@ -3108,13 +2995,20 @@
             <a:prstDash val="solid"/>
           </a:ln>
           <a:effectLst>
-            <a:outerShdw sx="100000" sy="100000" kx="0" ky="0" algn="bl" rotWithShape="0" blurRad="76200" dist="12700" dir="5400000">
+            <a:outerShdw blurRad="76200" dist="12700" dir="5400000" algn="bl" rotWithShape="0">
               <a:srgbClr val="3B342B">
                 <a:alpha val="14000"/>
               </a:srgbClr>
             </a:outerShdw>
           </a:effectLst>
         </p:spPr>
+        <p:txBody>
+          <a:bodyPr/>
+          <a:lstStyle/>
+          <a:p>
+            <a:endParaRPr lang="en-AU"/>
+          </a:p>
+        </p:txBody>
       </p:sp>
       <p:sp>
         <p:nvSpPr>
@@ -3135,6 +3029,13 @@
           </a:solidFill>
           <a:ln/>
         </p:spPr>
+        <p:txBody>
+          <a:bodyPr/>
+          <a:lstStyle/>
+          <a:p>
+            <a:endParaRPr lang="en-AU"/>
+          </a:p>
+        </p:txBody>
       </p:sp>
       <p:sp>
         <p:nvSpPr>
@@ -3157,7 +3058,7 @@
           <a:bodyPr wrap="square" lIns="0" tIns="0" rIns="0" bIns="0" rtlCol="0" anchor="ctr"/>
           <a:lstStyle/>
           <a:p>
-            <a:pPr indent="0" marL="0">
+            <a:pPr marL="0" indent="0">
               <a:buNone/>
             </a:pPr>
             <a:r>
@@ -3302,7 +3203,7 @@
           <a:bodyPr wrap="square" lIns="0" tIns="0" rIns="0" bIns="0" rtlCol="0" anchor="ctr"/>
           <a:lstStyle/>
           <a:p>
-            <a:pPr indent="0" marL="0">
+            <a:pPr marL="0" indent="0">
               <a:buNone/>
             </a:pPr>
             <a:r>
@@ -3322,14 +3223,14 @@
       </p:sp>
       <p:pic>
         <p:nvPicPr>
-          <p:cNvPr id="14" name="Image 0" descr="preencoded.png">    </p:cNvPr>
+          <p:cNvPr id="14" name="Image 0" descr="preencoded.png"/>
           <p:cNvPicPr>
             <a:picLocks noChangeAspect="1"/>
           </p:cNvPicPr>
           <p:nvPr/>
         </p:nvPicPr>
         <p:blipFill>
-          <a:blip r:embed="rId1"/>
+          <a:blip r:embed="rId3"/>
           <a:stretch>
             <a:fillRect/>
           </a:stretch>
@@ -3346,14 +3247,14 @@
       </p:pic>
       <p:pic>
         <p:nvPicPr>
-          <p:cNvPr id="15" name="Image 1" descr="preencoded.png">    </p:cNvPr>
+          <p:cNvPr id="15" name="Image 1" descr="preencoded.png"/>
           <p:cNvPicPr>
             <a:picLocks noChangeAspect="1"/>
           </p:cNvPicPr>
           <p:nvPr/>
         </p:nvPicPr>
         <p:blipFill>
-          <a:blip r:embed="rId2"/>
+          <a:blip r:embed="rId4"/>
           <a:stretch>
             <a:fillRect/>
           </a:stretch>
@@ -3389,6 +3290,13 @@
           </a:solidFill>
           <a:ln/>
         </p:spPr>
+        <p:txBody>
+          <a:bodyPr/>
+          <a:lstStyle/>
+          <a:p>
+            <a:endParaRPr lang="en-AU"/>
+          </a:p>
+        </p:txBody>
       </p:sp>
       <p:sp>
         <p:nvSpPr>
@@ -3411,7 +3319,7 @@
           <a:bodyPr wrap="square" lIns="0" tIns="0" rIns="0" bIns="0" rtlCol="0" anchor="ctr"/>
           <a:lstStyle/>
           <a:p>
-            <a:pPr indent="0" marL="0">
+            <a:pPr marL="0" indent="0">
               <a:buNone/>
             </a:pPr>
             <a:r>
@@ -3450,7 +3358,7 @@
           <a:bodyPr wrap="square" lIns="0" tIns="0" rIns="0" bIns="0" rtlCol="0" anchor="ctr"/>
           <a:lstStyle/>
           <a:p>
-            <a:pPr indent="0" marL="0">
+            <a:pPr marL="0" indent="0">
               <a:buNone/>
             </a:pPr>
             <a:r>
@@ -3484,6 +3392,7 @@
         <a:solidFill>
           <a:srgbClr val="FAF3E8"/>
         </a:solidFill>
+        <a:effectLst/>
       </p:bgPr>
     </p:bg>
     <p:spTree>
@@ -3521,11 +3430,11 @@
           <a:bodyPr wrap="square" lIns="0" tIns="0" rIns="0" bIns="0" rtlCol="0" anchor="ctr"/>
           <a:lstStyle/>
           <a:p>
-            <a:pPr indent="0" marL="0">
-              <a:buNone/>
-            </a:pPr>
-            <a:r>
-              <a:rPr lang="en-US" sz="1100" b="1" spc="200" kern="0" dirty="0">
+            <a:pPr marL="0" indent="0">
+              <a:buNone/>
+            </a:pPr>
+            <a:r>
+              <a:rPr lang="en-US" sz="1100" b="1" kern="0" spc="200" dirty="0">
                 <a:solidFill>
                   <a:srgbClr val="0E8C6A"/>
                 </a:solidFill>
@@ -3560,7 +3469,7 @@
           <a:bodyPr wrap="square" lIns="0" tIns="0" rIns="0" bIns="0" rtlCol="0" anchor="ctr"/>
           <a:lstStyle/>
           <a:p>
-            <a:pPr algn="l" indent="0" marL="0">
+            <a:pPr marL="0" indent="0" algn="l">
               <a:buNone/>
             </a:pPr>
             <a:r>
@@ -3604,13 +3513,20 @@
             <a:prstDash val="solid"/>
           </a:ln>
           <a:effectLst>
-            <a:outerShdw sx="100000" sy="100000" kx="0" ky="0" algn="bl" rotWithShape="0" blurRad="76200" dist="12700" dir="5400000">
+            <a:outerShdw blurRad="76200" dist="12700" dir="5400000" algn="bl" rotWithShape="0">
               <a:srgbClr val="3B342B">
                 <a:alpha val="14000"/>
               </a:srgbClr>
             </a:outerShdw>
           </a:effectLst>
         </p:spPr>
+        <p:txBody>
+          <a:bodyPr/>
+          <a:lstStyle/>
+          <a:p>
+            <a:endParaRPr lang="en-AU"/>
+          </a:p>
+        </p:txBody>
       </p:sp>
       <p:sp>
         <p:nvSpPr>
@@ -3633,7 +3549,7 @@
           <a:bodyPr wrap="square" lIns="0" tIns="0" rIns="0" bIns="0" rtlCol="0" anchor="ctr"/>
           <a:lstStyle/>
           <a:p>
-            <a:pPr algn="ctr" indent="0" marL="0">
+            <a:pPr marL="0" indent="0" algn="ctr">
               <a:buNone/>
             </a:pPr>
             <a:r>
@@ -3672,7 +3588,7 @@
           <a:bodyPr wrap="square" lIns="0" tIns="0" rIns="0" bIns="0" rtlCol="0" anchor="ctr"/>
           <a:lstStyle/>
           <a:p>
-            <a:pPr algn="ctr" indent="0" marL="0">
+            <a:pPr marL="0" indent="0" algn="ctr">
               <a:lnSpc>
                 <a:spcPts val="1500"/>
               </a:lnSpc>
@@ -3692,7 +3608,7 @@
             <a:endParaRPr lang="en-US" sz="1200" dirty="0"/>
           </a:p>
           <a:p>
-            <a:pPr algn="ctr" indent="0" marL="0">
+            <a:pPr marL="0" indent="0" algn="ctr">
               <a:lnSpc>
                 <a:spcPts val="1500"/>
               </a:lnSpc>
@@ -3734,7 +3650,7 @@
           <a:bodyPr wrap="square" lIns="0" tIns="0" rIns="0" bIns="0" rtlCol="0" anchor="ctr"/>
           <a:lstStyle/>
           <a:p>
-            <a:pPr algn="ctr" indent="0" marL="0">
+            <a:pPr marL="0" indent="0" algn="ctr">
               <a:buNone/>
             </a:pPr>
             <a:r>
@@ -3778,13 +3694,20 @@
             <a:prstDash val="solid"/>
           </a:ln>
           <a:effectLst>
-            <a:outerShdw sx="100000" sy="100000" kx="0" ky="0" algn="bl" rotWithShape="0" blurRad="76200" dist="12700" dir="5400000">
+            <a:outerShdw blurRad="76200" dist="12700" dir="5400000" algn="bl" rotWithShape="0">
               <a:srgbClr val="3B342B">
                 <a:alpha val="14000"/>
               </a:srgbClr>
             </a:outerShdw>
           </a:effectLst>
         </p:spPr>
+        <p:txBody>
+          <a:bodyPr/>
+          <a:lstStyle/>
+          <a:p>
+            <a:endParaRPr lang="en-AU"/>
+          </a:p>
+        </p:txBody>
       </p:sp>
       <p:sp>
         <p:nvSpPr>
@@ -3807,7 +3730,7 @@
           <a:bodyPr wrap="square" lIns="0" tIns="0" rIns="0" bIns="0" rtlCol="0" anchor="ctr"/>
           <a:lstStyle/>
           <a:p>
-            <a:pPr algn="ctr" indent="0" marL="0">
+            <a:pPr marL="0" indent="0" algn="ctr">
               <a:buNone/>
             </a:pPr>
             <a:r>
@@ -3846,7 +3769,7 @@
           <a:bodyPr wrap="square" lIns="0" tIns="0" rIns="0" bIns="0" rtlCol="0" anchor="ctr"/>
           <a:lstStyle/>
           <a:p>
-            <a:pPr algn="ctr" indent="0" marL="0">
+            <a:pPr marL="0" indent="0" algn="ctr">
               <a:lnSpc>
                 <a:spcPts val="1500"/>
               </a:lnSpc>
@@ -3866,7 +3789,7 @@
             <a:endParaRPr lang="en-US" sz="1200" dirty="0"/>
           </a:p>
           <a:p>
-            <a:pPr algn="ctr" indent="0" marL="0">
+            <a:pPr marL="0" indent="0" algn="ctr">
               <a:lnSpc>
                 <a:spcPts val="1500"/>
               </a:lnSpc>
@@ -3908,7 +3831,7 @@
           <a:bodyPr wrap="square" lIns="0" tIns="0" rIns="0" bIns="0" rtlCol="0" anchor="ctr"/>
           <a:lstStyle/>
           <a:p>
-            <a:pPr algn="ctr" indent="0" marL="0">
+            <a:pPr marL="0" indent="0" algn="ctr">
               <a:buNone/>
             </a:pPr>
             <a:r>
@@ -3952,13 +3875,20 @@
             <a:prstDash val="solid"/>
           </a:ln>
           <a:effectLst>
-            <a:outerShdw sx="100000" sy="100000" kx="0" ky="0" algn="bl" rotWithShape="0" blurRad="76200" dist="12700" dir="5400000">
+            <a:outerShdw blurRad="76200" dist="12700" dir="5400000" algn="bl" rotWithShape="0">
               <a:srgbClr val="3B342B">
                 <a:alpha val="14000"/>
               </a:srgbClr>
             </a:outerShdw>
           </a:effectLst>
         </p:spPr>
+        <p:txBody>
+          <a:bodyPr/>
+          <a:lstStyle/>
+          <a:p>
+            <a:endParaRPr lang="en-AU"/>
+          </a:p>
+        </p:txBody>
       </p:sp>
       <p:sp>
         <p:nvSpPr>
@@ -3981,7 +3911,7 @@
           <a:bodyPr wrap="square" lIns="0" tIns="0" rIns="0" bIns="0" rtlCol="0" anchor="ctr"/>
           <a:lstStyle/>
           <a:p>
-            <a:pPr algn="ctr" indent="0" marL="0">
+            <a:pPr marL="0" indent="0" algn="ctr">
               <a:buNone/>
             </a:pPr>
             <a:r>
@@ -4020,7 +3950,7 @@
           <a:bodyPr wrap="square" lIns="0" tIns="0" rIns="0" bIns="0" rtlCol="0" anchor="ctr"/>
           <a:lstStyle/>
           <a:p>
-            <a:pPr algn="ctr" indent="0" marL="0">
+            <a:pPr marL="0" indent="0" algn="ctr">
               <a:lnSpc>
                 <a:spcPts val="1500"/>
               </a:lnSpc>
@@ -4040,7 +3970,7 @@
             <a:endParaRPr lang="en-US" sz="1200" dirty="0"/>
           </a:p>
           <a:p>
-            <a:pPr algn="ctr" indent="0" marL="0">
+            <a:pPr marL="0" indent="0" algn="ctr">
               <a:lnSpc>
                 <a:spcPts val="1500"/>
               </a:lnSpc>
@@ -4082,7 +4012,7 @@
           <a:bodyPr wrap="square" lIns="0" tIns="0" rIns="0" bIns="0" rtlCol="0" anchor="ctr"/>
           <a:lstStyle/>
           <a:p>
-            <a:pPr algn="ctr" indent="0" marL="0">
+            <a:pPr marL="0" indent="0" algn="ctr">
               <a:buNone/>
             </a:pPr>
             <a:r>
@@ -4126,13 +4056,20 @@
             <a:prstDash val="solid"/>
           </a:ln>
           <a:effectLst>
-            <a:outerShdw sx="100000" sy="100000" kx="0" ky="0" algn="bl" rotWithShape="0" blurRad="76200" dist="12700" dir="5400000">
+            <a:outerShdw blurRad="76200" dist="12700" dir="5400000" algn="bl" rotWithShape="0">
               <a:srgbClr val="3B342B">
                 <a:alpha val="14000"/>
               </a:srgbClr>
             </a:outerShdw>
           </a:effectLst>
         </p:spPr>
+        <p:txBody>
+          <a:bodyPr/>
+          <a:lstStyle/>
+          <a:p>
+            <a:endParaRPr lang="en-AU"/>
+          </a:p>
+        </p:txBody>
       </p:sp>
       <p:sp>
         <p:nvSpPr>
@@ -4155,7 +4092,7 @@
           <a:bodyPr wrap="square" lIns="0" tIns="0" rIns="0" bIns="0" rtlCol="0" anchor="ctr"/>
           <a:lstStyle/>
           <a:p>
-            <a:pPr algn="ctr" indent="0" marL="0">
+            <a:pPr marL="0" indent="0" algn="ctr">
               <a:buNone/>
             </a:pPr>
             <a:r>
@@ -4194,7 +4131,7 @@
           <a:bodyPr wrap="square" lIns="0" tIns="0" rIns="0" bIns="0" rtlCol="0" anchor="ctr"/>
           <a:lstStyle/>
           <a:p>
-            <a:pPr algn="ctr" indent="0" marL="0">
+            <a:pPr marL="0" indent="0" algn="ctr">
               <a:lnSpc>
                 <a:spcPts val="1500"/>
               </a:lnSpc>
@@ -4214,7 +4151,7 @@
             <a:endParaRPr lang="en-US" sz="1200" dirty="0"/>
           </a:p>
           <a:p>
-            <a:pPr algn="ctr" indent="0" marL="0">
+            <a:pPr marL="0" indent="0" algn="ctr">
               <a:lnSpc>
                 <a:spcPts val="1500"/>
               </a:lnSpc>
@@ -4256,7 +4193,7 @@
           <a:bodyPr wrap="square" lIns="0" tIns="0" rIns="0" bIns="0" rtlCol="0" anchor="ctr"/>
           <a:lstStyle/>
           <a:p>
-            <a:pPr algn="ctr" indent="0" marL="0">
+            <a:pPr marL="0" indent="0" algn="ctr">
               <a:buNone/>
             </a:pPr>
             <a:r>
@@ -4300,13 +4237,20 @@
             <a:prstDash val="solid"/>
           </a:ln>
           <a:effectLst>
-            <a:outerShdw sx="100000" sy="100000" kx="0" ky="0" algn="bl" rotWithShape="0" blurRad="76200" dist="12700" dir="5400000">
+            <a:outerShdw blurRad="76200" dist="12700" dir="5400000" algn="bl" rotWithShape="0">
               <a:srgbClr val="3B342B">
                 <a:alpha val="14000"/>
               </a:srgbClr>
             </a:outerShdw>
           </a:effectLst>
         </p:spPr>
+        <p:txBody>
+          <a:bodyPr/>
+          <a:lstStyle/>
+          <a:p>
+            <a:endParaRPr lang="en-AU"/>
+          </a:p>
+        </p:txBody>
       </p:sp>
       <p:sp>
         <p:nvSpPr>
@@ -4329,7 +4273,7 @@
           <a:bodyPr wrap="square" lIns="0" tIns="0" rIns="0" bIns="0" rtlCol="0" anchor="ctr"/>
           <a:lstStyle/>
           <a:p>
-            <a:pPr algn="ctr" indent="0" marL="0">
+            <a:pPr marL="0" indent="0" algn="ctr">
               <a:buNone/>
             </a:pPr>
             <a:r>
@@ -4368,7 +4312,7 @@
           <a:bodyPr wrap="square" lIns="0" tIns="0" rIns="0" bIns="0" rtlCol="0" anchor="ctr"/>
           <a:lstStyle/>
           <a:p>
-            <a:pPr algn="ctr" indent="0" marL="0">
+            <a:pPr marL="0" indent="0" algn="ctr">
               <a:lnSpc>
                 <a:spcPts val="1500"/>
               </a:lnSpc>
@@ -4388,7 +4332,7 @@
             <a:endParaRPr lang="en-US" sz="1200" dirty="0"/>
           </a:p>
           <a:p>
-            <a:pPr algn="ctr" indent="0" marL="0">
+            <a:pPr marL="0" indent="0" algn="ctr">
               <a:lnSpc>
                 <a:spcPts val="1500"/>
               </a:lnSpc>
@@ -4430,7 +4374,7 @@
           <a:bodyPr wrap="square" lIns="0" tIns="0" rIns="0" bIns="0" rtlCol="0" anchor="ctr"/>
           <a:lstStyle/>
           <a:p>
-            <a:pPr indent="0" marL="0">
+            <a:pPr marL="0" indent="0">
               <a:buNone/>
             </a:pPr>
             <a:r>
@@ -4469,7 +4413,7 @@
           <a:bodyPr wrap="square" lIns="0" tIns="0" rIns="0" bIns="0" rtlCol="0" anchor="ctr"/>
           <a:lstStyle/>
           <a:p>
-            <a:pPr indent="0" marL="0">
+            <a:pPr marL="0" indent="0">
               <a:buNone/>
             </a:pPr>
             <a:r>
@@ -4513,13 +4457,20 @@
             <a:prstDash val="solid"/>
           </a:ln>
           <a:effectLst>
-            <a:outerShdw sx="100000" sy="100000" kx="0" ky="0" algn="bl" rotWithShape="0" blurRad="76200" dist="12700" dir="5400000">
+            <a:outerShdw blurRad="76200" dist="12700" dir="5400000" algn="bl" rotWithShape="0">
               <a:srgbClr val="3B342B">
                 <a:alpha val="14000"/>
               </a:srgbClr>
             </a:outerShdw>
           </a:effectLst>
         </p:spPr>
+        <p:txBody>
+          <a:bodyPr/>
+          <a:lstStyle/>
+          <a:p>
+            <a:endParaRPr lang="en-AU"/>
+          </a:p>
+        </p:txBody>
       </p:sp>
       <p:sp>
         <p:nvSpPr>
@@ -4540,17 +4491,24 @@
           </a:solidFill>
           <a:ln/>
         </p:spPr>
+        <p:txBody>
+          <a:bodyPr/>
+          <a:lstStyle/>
+          <a:p>
+            <a:endParaRPr lang="en-AU"/>
+          </a:p>
+        </p:txBody>
       </p:sp>
       <p:pic>
         <p:nvPicPr>
-          <p:cNvPr id="27" name="Image 0" descr="preencoded.png">    </p:cNvPr>
+          <p:cNvPr id="27" name="Image 0" descr="preencoded.png"/>
           <p:cNvPicPr>
             <a:picLocks noChangeAspect="1"/>
           </p:cNvPicPr>
           <p:nvPr/>
         </p:nvPicPr>
         <p:blipFill>
-          <a:blip r:embed="rId1"/>
+          <a:blip r:embed="rId3"/>
           <a:stretch>
             <a:fillRect/>
           </a:stretch>
@@ -4586,7 +4544,7 @@
           <a:bodyPr wrap="square" lIns="0" tIns="0" rIns="0" bIns="0" rtlCol="0" anchor="ctr"/>
           <a:lstStyle/>
           <a:p>
-            <a:pPr indent="0" marL="0">
+            <a:pPr marL="0" indent="0">
               <a:buNone/>
             </a:pPr>
             <a:r>
@@ -4625,7 +4583,7 @@
           <a:bodyPr wrap="square" lIns="0" tIns="0" rIns="0" bIns="0" rtlCol="0" anchor="ctr"/>
           <a:lstStyle/>
           <a:p>
-            <a:pPr indent="0" marL="0">
+            <a:pPr marL="0" indent="0">
               <a:lnSpc>
                 <a:spcPts val="1400"/>
               </a:lnSpc>
@@ -4672,13 +4630,20 @@
             <a:prstDash val="solid"/>
           </a:ln>
           <a:effectLst>
-            <a:outerShdw sx="100000" sy="100000" kx="0" ky="0" algn="bl" rotWithShape="0" blurRad="76200" dist="12700" dir="5400000">
+            <a:outerShdw blurRad="76200" dist="12700" dir="5400000" algn="bl" rotWithShape="0">
               <a:srgbClr val="3B342B">
                 <a:alpha val="14000"/>
               </a:srgbClr>
             </a:outerShdw>
           </a:effectLst>
         </p:spPr>
+        <p:txBody>
+          <a:bodyPr/>
+          <a:lstStyle/>
+          <a:p>
+            <a:endParaRPr lang="en-AU"/>
+          </a:p>
+        </p:txBody>
       </p:sp>
       <p:sp>
         <p:nvSpPr>
@@ -4699,17 +4664,24 @@
           </a:solidFill>
           <a:ln/>
         </p:spPr>
+        <p:txBody>
+          <a:bodyPr/>
+          <a:lstStyle/>
+          <a:p>
+            <a:endParaRPr lang="en-AU"/>
+          </a:p>
+        </p:txBody>
       </p:sp>
       <p:pic>
         <p:nvPicPr>
-          <p:cNvPr id="32" name="Image 1" descr="preencoded.png">    </p:cNvPr>
+          <p:cNvPr id="32" name="Image 1" descr="preencoded.png"/>
           <p:cNvPicPr>
             <a:picLocks noChangeAspect="1"/>
           </p:cNvPicPr>
           <p:nvPr/>
         </p:nvPicPr>
         <p:blipFill>
-          <a:blip r:embed="rId2"/>
+          <a:blip r:embed="rId4"/>
           <a:stretch>
             <a:fillRect/>
           </a:stretch>
@@ -4745,7 +4717,7 @@
           <a:bodyPr wrap="square" lIns="0" tIns="0" rIns="0" bIns="0" rtlCol="0" anchor="ctr"/>
           <a:lstStyle/>
           <a:p>
-            <a:pPr indent="0" marL="0">
+            <a:pPr marL="0" indent="0">
               <a:buNone/>
             </a:pPr>
             <a:r>
@@ -4784,7 +4756,7 @@
           <a:bodyPr wrap="square" lIns="0" tIns="0" rIns="0" bIns="0" rtlCol="0" anchor="ctr"/>
           <a:lstStyle/>
           <a:p>
-            <a:pPr indent="0" marL="0">
+            <a:pPr marL="0" indent="0">
               <a:lnSpc>
                 <a:spcPts val="1400"/>
               </a:lnSpc>
@@ -4831,13 +4803,20 @@
             <a:prstDash val="solid"/>
           </a:ln>
           <a:effectLst>
-            <a:outerShdw sx="100000" sy="100000" kx="0" ky="0" algn="bl" rotWithShape="0" blurRad="76200" dist="12700" dir="5400000">
+            <a:outerShdw blurRad="76200" dist="12700" dir="5400000" algn="bl" rotWithShape="0">
               <a:srgbClr val="3B342B">
                 <a:alpha val="14000"/>
               </a:srgbClr>
             </a:outerShdw>
           </a:effectLst>
         </p:spPr>
+        <p:txBody>
+          <a:bodyPr/>
+          <a:lstStyle/>
+          <a:p>
+            <a:endParaRPr lang="en-AU"/>
+          </a:p>
+        </p:txBody>
       </p:sp>
       <p:sp>
         <p:nvSpPr>
@@ -4858,17 +4837,24 @@
           </a:solidFill>
           <a:ln/>
         </p:spPr>
+        <p:txBody>
+          <a:bodyPr/>
+          <a:lstStyle/>
+          <a:p>
+            <a:endParaRPr lang="en-AU"/>
+          </a:p>
+        </p:txBody>
       </p:sp>
       <p:pic>
         <p:nvPicPr>
-          <p:cNvPr id="37" name="Image 2" descr="preencoded.png">    </p:cNvPr>
+          <p:cNvPr id="37" name="Image 2" descr="preencoded.png"/>
           <p:cNvPicPr>
             <a:picLocks noChangeAspect="1"/>
           </p:cNvPicPr>
           <p:nvPr/>
         </p:nvPicPr>
         <p:blipFill>
-          <a:blip r:embed="rId3"/>
+          <a:blip r:embed="rId5"/>
           <a:stretch>
             <a:fillRect/>
           </a:stretch>
@@ -4904,7 +4890,7 @@
           <a:bodyPr wrap="square" lIns="0" tIns="0" rIns="0" bIns="0" rtlCol="0" anchor="ctr"/>
           <a:lstStyle/>
           <a:p>
-            <a:pPr indent="0" marL="0">
+            <a:pPr marL="0" indent="0">
               <a:buNone/>
             </a:pPr>
             <a:r>
@@ -4943,7 +4929,7 @@
           <a:bodyPr wrap="square" lIns="0" tIns="0" rIns="0" bIns="0" rtlCol="0" anchor="ctr"/>
           <a:lstStyle/>
           <a:p>
-            <a:pPr indent="0" marL="0">
+            <a:pPr marL="0" indent="0">
               <a:lnSpc>
                 <a:spcPts val="1400"/>
               </a:lnSpc>
@@ -4990,13 +4976,20 @@
             <a:prstDash val="solid"/>
           </a:ln>
           <a:effectLst>
-            <a:outerShdw sx="100000" sy="100000" kx="0" ky="0" algn="bl" rotWithShape="0" blurRad="76200" dist="12700" dir="5400000">
+            <a:outerShdw blurRad="76200" dist="12700" dir="5400000" algn="bl" rotWithShape="0">
               <a:srgbClr val="3B342B">
                 <a:alpha val="14000"/>
               </a:srgbClr>
             </a:outerShdw>
           </a:effectLst>
         </p:spPr>
+        <p:txBody>
+          <a:bodyPr/>
+          <a:lstStyle/>
+          <a:p>
+            <a:endParaRPr lang="en-AU"/>
+          </a:p>
+        </p:txBody>
       </p:sp>
       <p:sp>
         <p:nvSpPr>
@@ -5017,17 +5010,24 @@
           </a:solidFill>
           <a:ln/>
         </p:spPr>
+        <p:txBody>
+          <a:bodyPr/>
+          <a:lstStyle/>
+          <a:p>
+            <a:endParaRPr lang="en-AU"/>
+          </a:p>
+        </p:txBody>
       </p:sp>
       <p:pic>
         <p:nvPicPr>
-          <p:cNvPr id="42" name="Image 3" descr="preencoded.png">    </p:cNvPr>
+          <p:cNvPr id="42" name="Image 3" descr="preencoded.png"/>
           <p:cNvPicPr>
             <a:picLocks noChangeAspect="1"/>
           </p:cNvPicPr>
           <p:nvPr/>
         </p:nvPicPr>
         <p:blipFill>
-          <a:blip r:embed="rId4"/>
+          <a:blip r:embed="rId6"/>
           <a:stretch>
             <a:fillRect/>
           </a:stretch>
@@ -5063,7 +5063,7 @@
           <a:bodyPr wrap="square" lIns="0" tIns="0" rIns="0" bIns="0" rtlCol="0" anchor="ctr"/>
           <a:lstStyle/>
           <a:p>
-            <a:pPr indent="0" marL="0">
+            <a:pPr marL="0" indent="0">
               <a:buNone/>
             </a:pPr>
             <a:r>
@@ -5102,7 +5102,7 @@
           <a:bodyPr wrap="square" lIns="0" tIns="0" rIns="0" bIns="0" rtlCol="0" anchor="ctr"/>
           <a:lstStyle/>
           <a:p>
-            <a:pPr indent="0" marL="0">
+            <a:pPr marL="0" indent="0">
               <a:lnSpc>
                 <a:spcPts val="1400"/>
               </a:lnSpc>
@@ -5139,6 +5139,7 @@
         <a:solidFill>
           <a:srgbClr val="FAF3E8"/>
         </a:solidFill>
+        <a:effectLst/>
       </p:bgPr>
     </p:bg>
     <p:spTree>
@@ -5176,11 +5177,11 @@
           <a:bodyPr wrap="square" lIns="0" tIns="0" rIns="0" bIns="0" rtlCol="0" anchor="ctr"/>
           <a:lstStyle/>
           <a:p>
-            <a:pPr indent="0" marL="0">
-              <a:buNone/>
-            </a:pPr>
-            <a:r>
-              <a:rPr lang="en-US" sz="1100" b="1" spc="200" kern="0" dirty="0">
+            <a:pPr marL="0" indent="0">
+              <a:buNone/>
+            </a:pPr>
+            <a:r>
+              <a:rPr lang="en-US" sz="1100" b="1" kern="0" spc="200" dirty="0">
                 <a:solidFill>
                   <a:srgbClr val="0E8C6A"/>
                 </a:solidFill>
@@ -5215,7 +5216,7 @@
           <a:bodyPr wrap="square" lIns="0" tIns="0" rIns="0" bIns="0" rtlCol="0" anchor="ctr"/>
           <a:lstStyle/>
           <a:p>
-            <a:pPr algn="l" indent="0" marL="0">
+            <a:pPr marL="0" indent="0" algn="l">
               <a:buNone/>
             </a:pPr>
             <a:r>
@@ -5249,16 +5250,34 @@
         </p:nvGraphicFramePr>
         <p:xfrm>
           <a:off x="566928" y="1353312"/>
-          <a:ext cx="11055096" cy="914400"/>
+          <a:ext cx="11055096" cy="2529840"/>
         </p:xfrm>
         <a:graphic>
           <a:graphicData uri="http://schemas.openxmlformats.org/drawingml/2006/table">
             <a:tbl>
               <a:tblPr/>
               <a:tblGrid>
-                <a:gridCol w="2286000"/>
-                <a:gridCol w="3017520"/>
-                <a:gridCol w="5751576"/>
+                <a:gridCol w="2286000">
+                  <a:extLst>
+                    <a:ext uri="{9D8B030D-6E8A-4147-A177-3AD203B41FA5}">
+                      <a16:colId xmlns:a16="http://schemas.microsoft.com/office/drawing/2014/main" val="20000"/>
+                    </a:ext>
+                  </a:extLst>
+                </a:gridCol>
+                <a:gridCol w="3017520">
+                  <a:extLst>
+                    <a:ext uri="{9D8B030D-6E8A-4147-A177-3AD203B41FA5}">
+                      <a16:colId xmlns:a16="http://schemas.microsoft.com/office/drawing/2014/main" val="20001"/>
+                    </a:ext>
+                  </a:extLst>
+                </a:gridCol>
+                <a:gridCol w="5751576">
+                  <a:extLst>
+                    <a:ext uri="{9D8B030D-6E8A-4147-A177-3AD203B41FA5}">
+                      <a16:colId xmlns:a16="http://schemas.microsoft.com/office/drawing/2014/main" val="20002"/>
+                    </a:ext>
+                  </a:extLst>
+                </a:gridCol>
               </a:tblGrid>
               <a:tr h="365760">
                 <a:tc>
@@ -5266,7 +5285,7 @@
                     <a:bodyPr/>
                     <a:lstStyle/>
                     <a:p>
-                      <a:pPr indent="0" marL="0">
+                      <a:pPr marL="0" indent="0">
                         <a:buNone/>
                       </a:pPr>
                       <a:r>
@@ -5334,7 +5353,7 @@
                     <a:bodyPr/>
                     <a:lstStyle/>
                     <a:p>
-                      <a:pPr indent="0" marL="0">
+                      <a:pPr marL="0" indent="0">
                         <a:buNone/>
                       </a:pPr>
                       <a:r>
@@ -5402,7 +5421,7 @@
                     <a:bodyPr/>
                     <a:lstStyle/>
                     <a:p>
-                      <a:pPr indent="0" marL="0">
+                      <a:pPr marL="0" indent="0">
                         <a:buNone/>
                       </a:pPr>
                       <a:r>
@@ -5465,6 +5484,11 @@
                     </a:solidFill>
                   </a:tcPr>
                 </a:tc>
+                <a:extLst>
+                  <a:ext uri="{0D108BD9-81ED-4DB2-BD59-A6C34878D82A}">
+                    <a16:rowId xmlns:a16="http://schemas.microsoft.com/office/drawing/2014/main" val="10000"/>
+                  </a:ext>
+                </a:extLst>
               </a:tr>
               <a:tr h="365760">
                 <a:tc>
@@ -5472,7 +5496,7 @@
                     <a:bodyPr/>
                     <a:lstStyle/>
                     <a:p>
-                      <a:pPr indent="0" marL="0">
+                      <a:pPr marL="0" indent="0">
                         <a:buNone/>
                       </a:pPr>
                       <a:r>
@@ -5540,7 +5564,7 @@
                     <a:bodyPr/>
                     <a:lstStyle/>
                     <a:p>
-                      <a:pPr indent="0" marL="0">
+                      <a:pPr marL="0" indent="0">
                         <a:buNone/>
                       </a:pPr>
                       <a:r>
@@ -5608,7 +5632,7 @@
                     <a:bodyPr/>
                     <a:lstStyle/>
                     <a:p>
-                      <a:pPr indent="0" marL="0">
+                      <a:pPr marL="0" indent="0">
                         <a:buNone/>
                       </a:pPr>
                       <a:r>
@@ -5671,6 +5695,11 @@
                     </a:solidFill>
                   </a:tcPr>
                 </a:tc>
+                <a:extLst>
+                  <a:ext uri="{0D108BD9-81ED-4DB2-BD59-A6C34878D82A}">
+                    <a16:rowId xmlns:a16="http://schemas.microsoft.com/office/drawing/2014/main" val="10001"/>
+                  </a:ext>
+                </a:extLst>
               </a:tr>
               <a:tr h="365760">
                 <a:tc>
@@ -5678,7 +5707,7 @@
                     <a:bodyPr/>
                     <a:lstStyle/>
                     <a:p>
-                      <a:pPr indent="0" marL="0">
+                      <a:pPr marL="0" indent="0">
                         <a:buNone/>
                       </a:pPr>
                       <a:r>
@@ -5746,7 +5775,7 @@
                     <a:bodyPr/>
                     <a:lstStyle/>
                     <a:p>
-                      <a:pPr indent="0" marL="0">
+                      <a:pPr marL="0" indent="0">
                         <a:buNone/>
                       </a:pPr>
                       <a:r>
@@ -5814,7 +5843,7 @@
                     <a:bodyPr/>
                     <a:lstStyle/>
                     <a:p>
-                      <a:pPr indent="0" marL="0">
+                      <a:pPr marL="0" indent="0">
                         <a:buNone/>
                       </a:pPr>
                       <a:r>
@@ -5877,6 +5906,11 @@
                     </a:solidFill>
                   </a:tcPr>
                 </a:tc>
+                <a:extLst>
+                  <a:ext uri="{0D108BD9-81ED-4DB2-BD59-A6C34878D82A}">
+                    <a16:rowId xmlns:a16="http://schemas.microsoft.com/office/drawing/2014/main" val="10002"/>
+                  </a:ext>
+                </a:extLst>
               </a:tr>
               <a:tr h="365760">
                 <a:tc>
@@ -5884,7 +5918,7 @@
                     <a:bodyPr/>
                     <a:lstStyle/>
                     <a:p>
-                      <a:pPr indent="0" marL="0">
+                      <a:pPr marL="0" indent="0">
                         <a:buNone/>
                       </a:pPr>
                       <a:r>
@@ -5952,7 +5986,7 @@
                     <a:bodyPr/>
                     <a:lstStyle/>
                     <a:p>
-                      <a:pPr indent="0" marL="0">
+                      <a:pPr marL="0" indent="0">
                         <a:buNone/>
                       </a:pPr>
                       <a:r>
@@ -6020,7 +6054,7 @@
                     <a:bodyPr/>
                     <a:lstStyle/>
                     <a:p>
-                      <a:pPr indent="0" marL="0">
+                      <a:pPr marL="0" indent="0">
                         <a:buNone/>
                       </a:pPr>
                       <a:r>
@@ -6083,6 +6117,11 @@
                     </a:solidFill>
                   </a:tcPr>
                 </a:tc>
+                <a:extLst>
+                  <a:ext uri="{0D108BD9-81ED-4DB2-BD59-A6C34878D82A}">
+                    <a16:rowId xmlns:a16="http://schemas.microsoft.com/office/drawing/2014/main" val="10003"/>
+                  </a:ext>
+                </a:extLst>
               </a:tr>
               <a:tr h="365760">
                 <a:tc>
@@ -6090,7 +6129,7 @@
                     <a:bodyPr/>
                     <a:lstStyle/>
                     <a:p>
-                      <a:pPr indent="0" marL="0">
+                      <a:pPr marL="0" indent="0">
                         <a:buNone/>
                       </a:pPr>
                       <a:r>
@@ -6158,7 +6197,7 @@
                     <a:bodyPr/>
                     <a:lstStyle/>
                     <a:p>
-                      <a:pPr indent="0" marL="0">
+                      <a:pPr marL="0" indent="0">
                         <a:buNone/>
                       </a:pPr>
                       <a:r>
@@ -6226,7 +6265,7 @@
                     <a:bodyPr/>
                     <a:lstStyle/>
                     <a:p>
-                      <a:pPr indent="0" marL="0">
+                      <a:pPr marL="0" indent="0">
                         <a:buNone/>
                       </a:pPr>
                       <a:r>
@@ -6289,6 +6328,11 @@
                     </a:solidFill>
                   </a:tcPr>
                 </a:tc>
+                <a:extLst>
+                  <a:ext uri="{0D108BD9-81ED-4DB2-BD59-A6C34878D82A}">
+                    <a16:rowId xmlns:a16="http://schemas.microsoft.com/office/drawing/2014/main" val="10004"/>
+                  </a:ext>
+                </a:extLst>
               </a:tr>
               <a:tr h="365760">
                 <a:tc>
@@ -6296,7 +6340,7 @@
                     <a:bodyPr/>
                     <a:lstStyle/>
                     <a:p>
-                      <a:pPr indent="0" marL="0">
+                      <a:pPr marL="0" indent="0">
                         <a:buNone/>
                       </a:pPr>
                       <a:r>
@@ -6364,7 +6408,7 @@
                     <a:bodyPr/>
                     <a:lstStyle/>
                     <a:p>
-                      <a:pPr indent="0" marL="0">
+                      <a:pPr marL="0" indent="0">
                         <a:buNone/>
                       </a:pPr>
                       <a:r>
@@ -6432,7 +6476,7 @@
                     <a:bodyPr/>
                     <a:lstStyle/>
                     <a:p>
-                      <a:pPr indent="0" marL="0">
+                      <a:pPr marL="0" indent="0">
                         <a:buNone/>
                       </a:pPr>
                       <a:r>
@@ -6495,6 +6539,11 @@
                     </a:solidFill>
                   </a:tcPr>
                 </a:tc>
+                <a:extLst>
+                  <a:ext uri="{0D108BD9-81ED-4DB2-BD59-A6C34878D82A}">
+                    <a16:rowId xmlns:a16="http://schemas.microsoft.com/office/drawing/2014/main" val="10005"/>
+                  </a:ext>
+                </a:extLst>
               </a:tr>
             </a:tbl>
           </a:graphicData>
@@ -6526,17 +6575,24 @@
             <a:prstDash val="solid"/>
           </a:ln>
           <a:effectLst>
-            <a:outerShdw sx="100000" sy="100000" kx="0" ky="0" algn="bl" rotWithShape="0" blurRad="76200" dist="12700" dir="5400000">
+            <a:outerShdw blurRad="76200" dist="12700" dir="5400000" algn="bl" rotWithShape="0">
               <a:srgbClr val="3B342B">
                 <a:alpha val="14000"/>
               </a:srgbClr>
             </a:outerShdw>
           </a:effectLst>
         </p:spPr>
-      </p:sp>
-      <p:sp>
-        <p:nvSpPr>
-          <p:cNvPr id="6" name="Text 3"/>
+        <p:txBody>
+          <a:bodyPr/>
+          <a:lstStyle/>
+          <a:p>
+            <a:endParaRPr lang="en-AU"/>
+          </a:p>
+        </p:txBody>
+      </p:sp>
+      <p:sp>
+        <p:nvSpPr>
+          <p:cNvPr id="4" name="Text 3"/>
           <p:cNvSpPr txBox="1"/>
           <p:nvPr/>
         </p:nvSpPr>
@@ -6555,7 +6611,7 @@
           <a:bodyPr wrap="square" lIns="0" tIns="0" rIns="0" bIns="0" rtlCol="0" anchor="ctr"/>
           <a:lstStyle/>
           <a:p>
-            <a:pPr indent="0" marL="0">
+            <a:pPr marL="0" indent="0">
               <a:buNone/>
             </a:pPr>
             <a:r>
@@ -6658,6 +6714,13 @@
           </a:solidFill>
           <a:ln/>
         </p:spPr>
+        <p:txBody>
+          <a:bodyPr/>
+          <a:lstStyle/>
+          <a:p>
+            <a:endParaRPr lang="en-AU"/>
+          </a:p>
+        </p:txBody>
       </p:sp>
       <p:sp>
         <p:nvSpPr>
@@ -6680,7 +6743,7 @@
           <a:bodyPr wrap="square" lIns="0" tIns="0" rIns="0" bIns="0" rtlCol="0" anchor="ctr"/>
           <a:lstStyle/>
           <a:p>
-            <a:pPr indent="0" marL="0">
+            <a:pPr marL="0" indent="0">
               <a:buNone/>
             </a:pPr>
             <a:r>
@@ -6804,7 +6867,7 @@
           <a:bodyPr wrap="square" lIns="0" tIns="0" rIns="0" bIns="0" rtlCol="0" anchor="ctr"/>
           <a:lstStyle/>
           <a:p>
-            <a:pPr indent="0" marL="0">
+            <a:pPr marL="0" indent="0">
               <a:buNone/>
             </a:pPr>
             <a:r>
@@ -6838,6 +6901,7 @@
         <a:solidFill>
           <a:srgbClr val="FAF3E8"/>
         </a:solidFill>
+        <a:effectLst/>
       </p:bgPr>
     </p:bg>
     <p:spTree>
@@ -6875,11 +6939,11 @@
           <a:bodyPr wrap="square" lIns="0" tIns="0" rIns="0" bIns="0" rtlCol="0" anchor="ctr"/>
           <a:lstStyle/>
           <a:p>
-            <a:pPr indent="0" marL="0">
-              <a:buNone/>
-            </a:pPr>
-            <a:r>
-              <a:rPr lang="en-US" sz="1100" b="1" spc="200" kern="0" dirty="0">
+            <a:pPr marL="0" indent="0">
+              <a:buNone/>
+            </a:pPr>
+            <a:r>
+              <a:rPr lang="en-US" sz="1100" b="1" kern="0" spc="200" dirty="0">
                 <a:solidFill>
                   <a:srgbClr val="0E8C6A"/>
                 </a:solidFill>
@@ -6914,7 +6978,7 @@
           <a:bodyPr wrap="square" lIns="0" tIns="0" rIns="0" bIns="0" rtlCol="0" anchor="ctr"/>
           <a:lstStyle/>
           <a:p>
-            <a:pPr algn="l" indent="0" marL="0">
+            <a:pPr marL="0" indent="0" algn="l">
               <a:buNone/>
             </a:pPr>
             <a:r>
@@ -6958,13 +7022,20 @@
             <a:prstDash val="solid"/>
           </a:ln>
           <a:effectLst>
-            <a:outerShdw sx="100000" sy="100000" kx="0" ky="0" algn="bl" rotWithShape="0" blurRad="76200" dist="12700" dir="5400000">
+            <a:outerShdw blurRad="76200" dist="12700" dir="5400000" algn="bl" rotWithShape="0">
               <a:srgbClr val="3B342B">
                 <a:alpha val="14000"/>
               </a:srgbClr>
             </a:outerShdw>
           </a:effectLst>
         </p:spPr>
+        <p:txBody>
+          <a:bodyPr/>
+          <a:lstStyle/>
+          <a:p>
+            <a:endParaRPr lang="en-AU"/>
+          </a:p>
+        </p:txBody>
       </p:sp>
       <p:sp>
         <p:nvSpPr>
@@ -6985,17 +7056,24 @@
           </a:solidFill>
           <a:ln/>
         </p:spPr>
+        <p:txBody>
+          <a:bodyPr/>
+          <a:lstStyle/>
+          <a:p>
+            <a:endParaRPr lang="en-AU"/>
+          </a:p>
+        </p:txBody>
       </p:sp>
       <p:pic>
         <p:nvPicPr>
-          <p:cNvPr id="6" name="Image 0" descr="preencoded.png">    </p:cNvPr>
+          <p:cNvPr id="6" name="Image 0" descr="preencoded.png"/>
           <p:cNvPicPr>
             <a:picLocks noChangeAspect="1"/>
           </p:cNvPicPr>
           <p:nvPr/>
         </p:nvPicPr>
         <p:blipFill>
-          <a:blip r:embed="rId1"/>
+          <a:blip r:embed="rId3"/>
           <a:stretch>
             <a:fillRect/>
           </a:stretch>
@@ -7031,7 +7109,7 @@
           <a:bodyPr wrap="square" lIns="0" tIns="0" rIns="0" bIns="0" rtlCol="0" anchor="ctr"/>
           <a:lstStyle/>
           <a:p>
-            <a:pPr indent="0" marL="0">
+            <a:pPr marL="0" indent="0">
               <a:buNone/>
             </a:pPr>
             <a:r>
@@ -7070,7 +7148,7 @@
           <a:bodyPr wrap="square" lIns="0" tIns="0" rIns="0" bIns="0" rtlCol="0" anchor="ctr"/>
           <a:lstStyle/>
           <a:p>
-            <a:pPr indent="0" marL="0">
+            <a:pPr marL="0" indent="0">
               <a:lnSpc>
                 <a:spcPts val="1400"/>
               </a:lnSpc>
@@ -7117,13 +7195,20 @@
             <a:prstDash val="solid"/>
           </a:ln>
           <a:effectLst>
-            <a:outerShdw sx="100000" sy="100000" kx="0" ky="0" algn="bl" rotWithShape="0" blurRad="76200" dist="12700" dir="5400000">
+            <a:outerShdw blurRad="76200" dist="12700" dir="5400000" algn="bl" rotWithShape="0">
               <a:srgbClr val="3B342B">
                 <a:alpha val="14000"/>
               </a:srgbClr>
             </a:outerShdw>
           </a:effectLst>
         </p:spPr>
+        <p:txBody>
+          <a:bodyPr/>
+          <a:lstStyle/>
+          <a:p>
+            <a:endParaRPr lang="en-AU"/>
+          </a:p>
+        </p:txBody>
       </p:sp>
       <p:sp>
         <p:nvSpPr>
@@ -7144,17 +7229,24 @@
           </a:solidFill>
           <a:ln/>
         </p:spPr>
+        <p:txBody>
+          <a:bodyPr/>
+          <a:lstStyle/>
+          <a:p>
+            <a:endParaRPr lang="en-AU"/>
+          </a:p>
+        </p:txBody>
       </p:sp>
       <p:pic>
         <p:nvPicPr>
-          <p:cNvPr id="11" name="Image 1" descr="preencoded.png">    </p:cNvPr>
+          <p:cNvPr id="11" name="Image 1" descr="preencoded.png"/>
           <p:cNvPicPr>
             <a:picLocks noChangeAspect="1"/>
           </p:cNvPicPr>
           <p:nvPr/>
         </p:nvPicPr>
         <p:blipFill>
-          <a:blip r:embed="rId2"/>
+          <a:blip r:embed="rId4"/>
           <a:stretch>
             <a:fillRect/>
           </a:stretch>
@@ -7190,7 +7282,7 @@
           <a:bodyPr wrap="square" lIns="0" tIns="0" rIns="0" bIns="0" rtlCol="0" anchor="ctr"/>
           <a:lstStyle/>
           <a:p>
-            <a:pPr indent="0" marL="0">
+            <a:pPr marL="0" indent="0">
               <a:buNone/>
             </a:pPr>
             <a:r>
@@ -7229,7 +7321,7 @@
           <a:bodyPr wrap="square" lIns="0" tIns="0" rIns="0" bIns="0" rtlCol="0" anchor="ctr"/>
           <a:lstStyle/>
           <a:p>
-            <a:pPr indent="0" marL="0">
+            <a:pPr marL="0" indent="0">
               <a:lnSpc>
                 <a:spcPts val="1400"/>
               </a:lnSpc>
@@ -7276,13 +7368,20 @@
             <a:prstDash val="solid"/>
           </a:ln>
           <a:effectLst>
-            <a:outerShdw sx="100000" sy="100000" kx="0" ky="0" algn="bl" rotWithShape="0" blurRad="76200" dist="12700" dir="5400000">
+            <a:outerShdw blurRad="76200" dist="12700" dir="5400000" algn="bl" rotWithShape="0">
               <a:srgbClr val="3B342B">
                 <a:alpha val="14000"/>
               </a:srgbClr>
             </a:outerShdw>
           </a:effectLst>
         </p:spPr>
+        <p:txBody>
+          <a:bodyPr/>
+          <a:lstStyle/>
+          <a:p>
+            <a:endParaRPr lang="en-AU"/>
+          </a:p>
+        </p:txBody>
       </p:sp>
       <p:sp>
         <p:nvSpPr>
@@ -7303,17 +7402,24 @@
           </a:solidFill>
           <a:ln/>
         </p:spPr>
+        <p:txBody>
+          <a:bodyPr/>
+          <a:lstStyle/>
+          <a:p>
+            <a:endParaRPr lang="en-AU"/>
+          </a:p>
+        </p:txBody>
       </p:sp>
       <p:pic>
         <p:nvPicPr>
-          <p:cNvPr id="16" name="Image 2" descr="preencoded.png">    </p:cNvPr>
+          <p:cNvPr id="16" name="Image 2" descr="preencoded.png"/>
           <p:cNvPicPr>
             <a:picLocks noChangeAspect="1"/>
           </p:cNvPicPr>
           <p:nvPr/>
         </p:nvPicPr>
         <p:blipFill>
-          <a:blip r:embed="rId3"/>
+          <a:blip r:embed="rId5"/>
           <a:stretch>
             <a:fillRect/>
           </a:stretch>
@@ -7349,7 +7455,7 @@
           <a:bodyPr wrap="square" lIns="0" tIns="0" rIns="0" bIns="0" rtlCol="0" anchor="ctr"/>
           <a:lstStyle/>
           <a:p>
-            <a:pPr indent="0" marL="0">
+            <a:pPr marL="0" indent="0">
               <a:buNone/>
             </a:pPr>
             <a:r>
@@ -7388,7 +7494,7 @@
           <a:bodyPr wrap="square" lIns="0" tIns="0" rIns="0" bIns="0" rtlCol="0" anchor="ctr"/>
           <a:lstStyle/>
           <a:p>
-            <a:pPr indent="0" marL="0">
+            <a:pPr marL="0" indent="0">
               <a:lnSpc>
                 <a:spcPts val="1400"/>
               </a:lnSpc>
@@ -7435,13 +7541,20 @@
             <a:prstDash val="solid"/>
           </a:ln>
           <a:effectLst>
-            <a:outerShdw sx="100000" sy="100000" kx="0" ky="0" algn="bl" rotWithShape="0" blurRad="76200" dist="12700" dir="5400000">
+            <a:outerShdw blurRad="76200" dist="12700" dir="5400000" algn="bl" rotWithShape="0">
               <a:srgbClr val="3B342B">
                 <a:alpha val="14000"/>
               </a:srgbClr>
             </a:outerShdw>
           </a:effectLst>
         </p:spPr>
+        <p:txBody>
+          <a:bodyPr/>
+          <a:lstStyle/>
+          <a:p>
+            <a:endParaRPr lang="en-AU"/>
+          </a:p>
+        </p:txBody>
       </p:sp>
       <p:sp>
         <p:nvSpPr>
@@ -7462,17 +7575,24 @@
           </a:solidFill>
           <a:ln/>
         </p:spPr>
+        <p:txBody>
+          <a:bodyPr/>
+          <a:lstStyle/>
+          <a:p>
+            <a:endParaRPr lang="en-AU"/>
+          </a:p>
+        </p:txBody>
       </p:sp>
       <p:pic>
         <p:nvPicPr>
-          <p:cNvPr id="21" name="Image 3" descr="preencoded.png">    </p:cNvPr>
+          <p:cNvPr id="21" name="Image 3" descr="preencoded.png"/>
           <p:cNvPicPr>
             <a:picLocks noChangeAspect="1"/>
           </p:cNvPicPr>
           <p:nvPr/>
         </p:nvPicPr>
         <p:blipFill>
-          <a:blip r:embed="rId4"/>
+          <a:blip r:embed="rId6"/>
           <a:stretch>
             <a:fillRect/>
           </a:stretch>
@@ -7508,7 +7628,7 @@
           <a:bodyPr wrap="square" lIns="0" tIns="0" rIns="0" bIns="0" rtlCol="0" anchor="ctr"/>
           <a:lstStyle/>
           <a:p>
-            <a:pPr indent="0" marL="0">
+            <a:pPr marL="0" indent="0">
               <a:buNone/>
             </a:pPr>
             <a:r>
@@ -7547,7 +7667,7 @@
           <a:bodyPr wrap="square" lIns="0" tIns="0" rIns="0" bIns="0" rtlCol="0" anchor="ctr"/>
           <a:lstStyle/>
           <a:p>
-            <a:pPr indent="0" marL="0">
+            <a:pPr marL="0" indent="0">
               <a:lnSpc>
                 <a:spcPts val="1400"/>
               </a:lnSpc>
@@ -7594,13 +7714,20 @@
             <a:prstDash val="solid"/>
           </a:ln>
           <a:effectLst>
-            <a:outerShdw sx="100000" sy="100000" kx="0" ky="0" algn="bl" rotWithShape="0" blurRad="76200" dist="12700" dir="5400000">
+            <a:outerShdw blurRad="76200" dist="12700" dir="5400000" algn="bl" rotWithShape="0">
               <a:srgbClr val="3B342B">
                 <a:alpha val="14000"/>
               </a:srgbClr>
             </a:outerShdw>
           </a:effectLst>
         </p:spPr>
+        <p:txBody>
+          <a:bodyPr/>
+          <a:lstStyle/>
+          <a:p>
+            <a:endParaRPr lang="en-AU"/>
+          </a:p>
+        </p:txBody>
       </p:sp>
       <p:sp>
         <p:nvSpPr>
@@ -7621,17 +7748,24 @@
           </a:solidFill>
           <a:ln/>
         </p:spPr>
+        <p:txBody>
+          <a:bodyPr/>
+          <a:lstStyle/>
+          <a:p>
+            <a:endParaRPr lang="en-AU"/>
+          </a:p>
+        </p:txBody>
       </p:sp>
       <p:pic>
         <p:nvPicPr>
-          <p:cNvPr id="26" name="Image 4" descr="preencoded.png">    </p:cNvPr>
+          <p:cNvPr id="26" name="Image 4" descr="preencoded.png"/>
           <p:cNvPicPr>
             <a:picLocks noChangeAspect="1"/>
           </p:cNvPicPr>
           <p:nvPr/>
         </p:nvPicPr>
         <p:blipFill>
-          <a:blip r:embed="rId5"/>
+          <a:blip r:embed="rId7"/>
           <a:stretch>
             <a:fillRect/>
           </a:stretch>
@@ -7667,7 +7801,7 @@
           <a:bodyPr wrap="square" lIns="0" tIns="0" rIns="0" bIns="0" rtlCol="0" anchor="ctr"/>
           <a:lstStyle/>
           <a:p>
-            <a:pPr indent="0" marL="0">
+            <a:pPr marL="0" indent="0">
               <a:buNone/>
             </a:pPr>
             <a:r>
@@ -7706,7 +7840,7 @@
           <a:bodyPr wrap="square" lIns="0" tIns="0" rIns="0" bIns="0" rtlCol="0" anchor="ctr"/>
           <a:lstStyle/>
           <a:p>
-            <a:pPr indent="0" marL="0">
+            <a:pPr marL="0" indent="0">
               <a:lnSpc>
                 <a:spcPts val="1400"/>
               </a:lnSpc>
@@ -7753,13 +7887,20 @@
             <a:prstDash val="solid"/>
           </a:ln>
           <a:effectLst>
-            <a:outerShdw sx="100000" sy="100000" kx="0" ky="0" algn="bl" rotWithShape="0" blurRad="76200" dist="12700" dir="5400000">
+            <a:outerShdw blurRad="76200" dist="12700" dir="5400000" algn="bl" rotWithShape="0">
               <a:srgbClr val="3B342B">
                 <a:alpha val="14000"/>
               </a:srgbClr>
             </a:outerShdw>
           </a:effectLst>
         </p:spPr>
+        <p:txBody>
+          <a:bodyPr/>
+          <a:lstStyle/>
+          <a:p>
+            <a:endParaRPr lang="en-AU"/>
+          </a:p>
+        </p:txBody>
       </p:sp>
       <p:sp>
         <p:nvSpPr>
@@ -7780,17 +7921,24 @@
           </a:solidFill>
           <a:ln/>
         </p:spPr>
+        <p:txBody>
+          <a:bodyPr/>
+          <a:lstStyle/>
+          <a:p>
+            <a:endParaRPr lang="en-AU"/>
+          </a:p>
+        </p:txBody>
       </p:sp>
       <p:pic>
         <p:nvPicPr>
-          <p:cNvPr id="31" name="Image 5" descr="preencoded.png">    </p:cNvPr>
+          <p:cNvPr id="31" name="Image 5" descr="preencoded.png"/>
           <p:cNvPicPr>
             <a:picLocks noChangeAspect="1"/>
           </p:cNvPicPr>
           <p:nvPr/>
         </p:nvPicPr>
         <p:blipFill>
-          <a:blip r:embed="rId6"/>
+          <a:blip r:embed="rId8"/>
           <a:stretch>
             <a:fillRect/>
           </a:stretch>
@@ -7826,7 +7974,7 @@
           <a:bodyPr wrap="square" lIns="0" tIns="0" rIns="0" bIns="0" rtlCol="0" anchor="ctr"/>
           <a:lstStyle/>
           <a:p>
-            <a:pPr indent="0" marL="0">
+            <a:pPr marL="0" indent="0">
               <a:buNone/>
             </a:pPr>
             <a:r>
@@ -7865,7 +8013,7 @@
           <a:bodyPr wrap="square" lIns="0" tIns="0" rIns="0" bIns="0" rtlCol="0" anchor="ctr"/>
           <a:lstStyle/>
           <a:p>
-            <a:pPr indent="0" marL="0">
+            <a:pPr marL="0" indent="0">
               <a:lnSpc>
                 <a:spcPts val="1400"/>
               </a:lnSpc>
@@ -7912,6 +8060,13 @@
             <a:prstDash val="solid"/>
           </a:ln>
         </p:spPr>
+        <p:txBody>
+          <a:bodyPr/>
+          <a:lstStyle/>
+          <a:p>
+            <a:endParaRPr lang="en-AU"/>
+          </a:p>
+        </p:txBody>
       </p:sp>
       <p:sp>
         <p:nvSpPr>
@@ -7934,7 +8089,7 @@
           <a:bodyPr wrap="square" lIns="0" tIns="0" rIns="0" bIns="0" rtlCol="0" anchor="ctr"/>
           <a:lstStyle/>
           <a:p>
-            <a:pPr indent="0" marL="0">
+            <a:pPr marL="0" indent="0">
               <a:buNone/>
             </a:pPr>
             <a:r>
@@ -7973,6 +8128,13 @@
           </a:solidFill>
           <a:ln/>
         </p:spPr>
+        <p:txBody>
+          <a:bodyPr/>
+          <a:lstStyle/>
+          <a:p>
+            <a:endParaRPr lang="en-AU"/>
+          </a:p>
+        </p:txBody>
       </p:sp>
       <p:sp>
         <p:nvSpPr>
@@ -7995,7 +8157,7 @@
           <a:bodyPr wrap="square" lIns="0" tIns="0" rIns="0" bIns="0" rtlCol="0" anchor="ctr"/>
           <a:lstStyle/>
           <a:p>
-            <a:pPr algn="ctr" indent="0" marL="0">
+            <a:pPr marL="0" indent="0" algn="ctr">
               <a:buNone/>
             </a:pPr>
             <a:r>
@@ -8034,6 +8196,13 @@
           </a:solidFill>
           <a:ln/>
         </p:spPr>
+        <p:txBody>
+          <a:bodyPr/>
+          <a:lstStyle/>
+          <a:p>
+            <a:endParaRPr lang="en-AU"/>
+          </a:p>
+        </p:txBody>
       </p:sp>
       <p:sp>
         <p:nvSpPr>
@@ -8056,7 +8225,7 @@
           <a:bodyPr wrap="square" lIns="0" tIns="0" rIns="0" bIns="0" rtlCol="0" anchor="ctr"/>
           <a:lstStyle/>
           <a:p>
-            <a:pPr algn="ctr" indent="0" marL="0">
+            <a:pPr marL="0" indent="0" algn="ctr">
               <a:buNone/>
             </a:pPr>
             <a:r>
@@ -8095,6 +8264,13 @@
           </a:solidFill>
           <a:ln/>
         </p:spPr>
+        <p:txBody>
+          <a:bodyPr/>
+          <a:lstStyle/>
+          <a:p>
+            <a:endParaRPr lang="en-AU"/>
+          </a:p>
+        </p:txBody>
       </p:sp>
       <p:sp>
         <p:nvSpPr>
@@ -8117,7 +8293,7 @@
           <a:bodyPr wrap="square" lIns="0" tIns="0" rIns="0" bIns="0" rtlCol="0" anchor="ctr"/>
           <a:lstStyle/>
           <a:p>
-            <a:pPr algn="ctr" indent="0" marL="0">
+            <a:pPr marL="0" indent="0" algn="ctr">
               <a:buNone/>
             </a:pPr>
             <a:r>
@@ -8156,6 +8332,13 @@
           </a:solidFill>
           <a:ln/>
         </p:spPr>
+        <p:txBody>
+          <a:bodyPr/>
+          <a:lstStyle/>
+          <a:p>
+            <a:endParaRPr lang="en-AU"/>
+          </a:p>
+        </p:txBody>
       </p:sp>
       <p:sp>
         <p:nvSpPr>
@@ -8178,7 +8361,7 @@
           <a:bodyPr wrap="square" lIns="0" tIns="0" rIns="0" bIns="0" rtlCol="0" anchor="ctr"/>
           <a:lstStyle/>
           <a:p>
-            <a:pPr algn="ctr" indent="0" marL="0">
+            <a:pPr marL="0" indent="0" algn="ctr">
               <a:buNone/>
             </a:pPr>
             <a:r>
@@ -8217,6 +8400,13 @@
           </a:solidFill>
           <a:ln/>
         </p:spPr>
+        <p:txBody>
+          <a:bodyPr/>
+          <a:lstStyle/>
+          <a:p>
+            <a:endParaRPr lang="en-AU"/>
+          </a:p>
+        </p:txBody>
       </p:sp>
       <p:sp>
         <p:nvSpPr>
@@ -8239,7 +8429,7 @@
           <a:bodyPr wrap="square" lIns="0" tIns="0" rIns="0" bIns="0" rtlCol="0" anchor="ctr"/>
           <a:lstStyle/>
           <a:p>
-            <a:pPr algn="ctr" indent="0" marL="0">
+            <a:pPr marL="0" indent="0" algn="ctr">
               <a:buNone/>
             </a:pPr>
             <a:r>
@@ -8278,6 +8468,13 @@
           </a:solidFill>
           <a:ln/>
         </p:spPr>
+        <p:txBody>
+          <a:bodyPr/>
+          <a:lstStyle/>
+          <a:p>
+            <a:endParaRPr lang="en-AU"/>
+          </a:p>
+        </p:txBody>
       </p:sp>
       <p:sp>
         <p:nvSpPr>
@@ -8300,7 +8497,7 @@
           <a:bodyPr wrap="square" lIns="0" tIns="0" rIns="0" bIns="0" rtlCol="0" anchor="ctr"/>
           <a:lstStyle/>
           <a:p>
-            <a:pPr algn="ctr" indent="0" marL="0">
+            <a:pPr marL="0" indent="0" algn="ctr">
               <a:buNone/>
             </a:pPr>
             <a:r>
@@ -8339,7 +8536,7 @@
           <a:bodyPr wrap="square" lIns="0" tIns="0" rIns="0" bIns="0" rtlCol="0" anchor="ctr"/>
           <a:lstStyle/>
           <a:p>
-            <a:pPr indent="0" marL="0">
+            <a:pPr marL="0" indent="0">
               <a:buNone/>
             </a:pPr>
             <a:r>
@@ -8378,7 +8575,7 @@
           <a:bodyPr wrap="square" lIns="0" tIns="0" rIns="0" bIns="0" rtlCol="0" anchor="ctr"/>
           <a:lstStyle/>
           <a:p>
-            <a:pPr indent="0" marL="0">
+            <a:pPr marL="0" indent="0">
               <a:buNone/>
             </a:pPr>
             <a:r>
@@ -8412,6 +8609,7 @@
         <a:solidFill>
           <a:srgbClr val="123A2D"/>
         </a:solidFill>
+        <a:effectLst/>
       </p:bgPr>
     </p:bg>
     <p:spTree>
@@ -8449,7 +8647,7 @@
           <a:bodyPr wrap="square" lIns="0" tIns="0" rIns="0" bIns="0" rtlCol="0" anchor="ctr"/>
           <a:lstStyle/>
           <a:p>
-            <a:pPr indent="0" marL="0">
+            <a:pPr marL="0" indent="0">
               <a:buNone/>
             </a:pPr>
             <a:r>
@@ -8488,7 +8686,7 @@
           <a:bodyPr wrap="square" lIns="0" tIns="0" rIns="0" bIns="0" rtlCol="0" anchor="ctr"/>
           <a:lstStyle/>
           <a:p>
-            <a:pPr indent="0" marL="0">
+            <a:pPr marL="0" indent="0">
               <a:buNone/>
             </a:pPr>
             <a:r>
@@ -8525,6 +8723,13 @@
           </a:solidFill>
           <a:ln/>
         </p:spPr>
+        <p:txBody>
+          <a:bodyPr/>
+          <a:lstStyle/>
+          <a:p>
+            <a:endParaRPr lang="en-AU"/>
+          </a:p>
+        </p:txBody>
       </p:sp>
       <p:sp>
         <p:nvSpPr>
@@ -8547,7 +8752,7 @@
           <a:bodyPr wrap="square" lIns="0" tIns="0" rIns="0" bIns="0" rtlCol="0" anchor="ctr"/>
           <a:lstStyle/>
           <a:p>
-            <a:pPr algn="ctr" indent="0" marL="0">
+            <a:pPr marL="0" indent="0" algn="ctr">
               <a:buNone/>
             </a:pPr>
             <a:r>
@@ -8586,7 +8791,7 @@
           <a:bodyPr wrap="square" lIns="0" tIns="0" rIns="0" bIns="0" rtlCol="0" anchor="ctr"/>
           <a:lstStyle/>
           <a:p>
-            <a:pPr indent="0" marL="0">
+            <a:pPr marL="0" indent="0">
               <a:buNone/>
             </a:pPr>
             <a:r>
@@ -8625,6 +8830,13 @@
           </a:solidFill>
           <a:ln/>
         </p:spPr>
+        <p:txBody>
+          <a:bodyPr/>
+          <a:lstStyle/>
+          <a:p>
+            <a:endParaRPr lang="en-AU"/>
+          </a:p>
+        </p:txBody>
       </p:sp>
       <p:sp>
         <p:nvSpPr>
@@ -8647,7 +8859,7 @@
           <a:bodyPr wrap="square" lIns="0" tIns="0" rIns="0" bIns="0" rtlCol="0" anchor="ctr"/>
           <a:lstStyle/>
           <a:p>
-            <a:pPr algn="ctr" indent="0" marL="0">
+            <a:pPr marL="0" indent="0" algn="ctr">
               <a:buNone/>
             </a:pPr>
             <a:r>
@@ -8686,7 +8898,7 @@
           <a:bodyPr wrap="square" lIns="0" tIns="0" rIns="0" bIns="0" rtlCol="0" anchor="ctr"/>
           <a:lstStyle/>
           <a:p>
-            <a:pPr indent="0" marL="0">
+            <a:pPr marL="0" indent="0">
               <a:lnSpc>
                 <a:spcPts val="1800"/>
               </a:lnSpc>
@@ -8726,6 +8938,13 @@
           </a:solidFill>
           <a:ln/>
         </p:spPr>
+        <p:txBody>
+          <a:bodyPr/>
+          <a:lstStyle/>
+          <a:p>
+            <a:endParaRPr lang="en-AU"/>
+          </a:p>
+        </p:txBody>
       </p:sp>
       <p:sp>
         <p:nvSpPr>
@@ -8748,7 +8967,7 @@
           <a:bodyPr wrap="square" lIns="0" tIns="0" rIns="0" bIns="0" rtlCol="0" anchor="ctr"/>
           <a:lstStyle/>
           <a:p>
-            <a:pPr algn="ctr" indent="0" marL="0">
+            <a:pPr marL="0" indent="0" algn="ctr">
               <a:buNone/>
             </a:pPr>
             <a:r>
@@ -8787,7 +9006,7 @@
           <a:bodyPr wrap="square" lIns="0" tIns="0" rIns="0" bIns="0" rtlCol="0" anchor="ctr"/>
           <a:lstStyle/>
           <a:p>
-            <a:pPr indent="0" marL="0">
+            <a:pPr marL="0" indent="0">
               <a:buNone/>
             </a:pPr>
             <a:r>
@@ -8826,6 +9045,13 @@
           </a:solidFill>
           <a:ln/>
         </p:spPr>
+        <p:txBody>
+          <a:bodyPr/>
+          <a:lstStyle/>
+          <a:p>
+            <a:endParaRPr lang="en-AU"/>
+          </a:p>
+        </p:txBody>
       </p:sp>
       <p:sp>
         <p:nvSpPr>
@@ -8848,7 +9074,7 @@
           <a:bodyPr wrap="square" lIns="0" tIns="0" rIns="0" bIns="0" rtlCol="0" anchor="ctr"/>
           <a:lstStyle/>
           <a:p>
-            <a:pPr algn="ctr" indent="0" marL="0">
+            <a:pPr marL="0" indent="0" algn="ctr">
               <a:buNone/>
             </a:pPr>
             <a:r>
@@ -8887,7 +9113,7 @@
           <a:bodyPr wrap="square" lIns="0" tIns="0" rIns="0" bIns="0" rtlCol="0" anchor="ctr"/>
           <a:lstStyle/>
           <a:p>
-            <a:pPr indent="0" marL="0">
+            <a:pPr marL="0" indent="0">
               <a:lnSpc>
                 <a:spcPts val="1800"/>
               </a:lnSpc>
@@ -8927,6 +9153,13 @@
           </a:solidFill>
           <a:ln/>
         </p:spPr>
+        <p:txBody>
+          <a:bodyPr/>
+          <a:lstStyle/>
+          <a:p>
+            <a:endParaRPr lang="en-AU"/>
+          </a:p>
+        </p:txBody>
       </p:sp>
       <p:sp>
         <p:nvSpPr>
@@ -8949,7 +9182,7 @@
           <a:bodyPr wrap="square" lIns="0" tIns="0" rIns="0" bIns="0" rtlCol="0" anchor="ctr"/>
           <a:lstStyle/>
           <a:p>
-            <a:pPr algn="ctr" indent="0" marL="0">
+            <a:pPr marL="0" indent="0" algn="ctr">
               <a:buNone/>
             </a:pPr>
             <a:r>
@@ -8988,7 +9221,7 @@
           <a:bodyPr wrap="square" lIns="0" tIns="0" rIns="0" bIns="0" rtlCol="0" anchor="ctr"/>
           <a:lstStyle/>
           <a:p>
-            <a:pPr indent="0" marL="0">
+            <a:pPr marL="0" indent="0">
               <a:buNone/>
             </a:pPr>
             <a:r>
@@ -9027,6 +9260,13 @@
           </a:solidFill>
           <a:ln/>
         </p:spPr>
+        <p:txBody>
+          <a:bodyPr/>
+          <a:lstStyle/>
+          <a:p>
+            <a:endParaRPr lang="en-AU"/>
+          </a:p>
+        </p:txBody>
       </p:sp>
       <p:sp>
         <p:nvSpPr>
@@ -9049,7 +9289,7 @@
           <a:bodyPr wrap="square" lIns="0" tIns="0" rIns="0" bIns="0" rtlCol="0" anchor="ctr"/>
           <a:lstStyle/>
           <a:p>
-            <a:pPr algn="ctr" indent="0" marL="0">
+            <a:pPr marL="0" indent="0" algn="ctr">
               <a:buNone/>
             </a:pPr>
             <a:r>
@@ -9088,7 +9328,7 @@
           <a:bodyPr wrap="square" lIns="0" tIns="0" rIns="0" bIns="0" rtlCol="0" anchor="ctr"/>
           <a:lstStyle/>
           <a:p>
-            <a:pPr indent="0" marL="0">
+            <a:pPr marL="0" indent="0">
               <a:lnSpc>
                 <a:spcPts val="1800"/>
               </a:lnSpc>
@@ -9131,17 +9371,24 @@
             <a:prstDash val="solid"/>
           </a:ln>
         </p:spPr>
+        <p:txBody>
+          <a:bodyPr/>
+          <a:lstStyle/>
+          <a:p>
+            <a:endParaRPr lang="en-AU"/>
+          </a:p>
+        </p:txBody>
       </p:sp>
       <p:pic>
         <p:nvPicPr>
-          <p:cNvPr id="23" name="Image 0" descr="preencoded.png">    </p:cNvPr>
+          <p:cNvPr id="23" name="Image 0" descr="preencoded.png"/>
           <p:cNvPicPr>
             <a:picLocks noChangeAspect="1"/>
           </p:cNvPicPr>
           <p:nvPr/>
         </p:nvPicPr>
         <p:blipFill>
-          <a:blip r:embed="rId1"/>
+          <a:blip r:embed="rId3"/>
           <a:stretch>
             <a:fillRect/>
           </a:stretch>
@@ -9177,7 +9424,7 @@
           <a:bodyPr wrap="square" lIns="0" tIns="0" rIns="0" bIns="0" rtlCol="0" anchor="ctr"/>
           <a:lstStyle/>
           <a:p>
-            <a:pPr indent="0" marL="0">
+            <a:pPr marL="0" indent="0">
               <a:buNone/>
             </a:pPr>
             <a:r>
@@ -9496,4 +9743,319 @@
     </a:ext>
   </a:extLst>
 </a:theme>
+</file>
+
+<file path=ppt/theme/theme2.xml><?xml version="1.0" encoding="utf-8"?>
+<a:theme xmlns:a="http://schemas.openxmlformats.org/drawingml/2006/main" name="Office Theme">
+  <a:themeElements>
+    <a:clrScheme name="Office">
+      <a:dk1>
+        <a:sysClr val="windowText" lastClr="000000"/>
+      </a:dk1>
+      <a:lt1>
+        <a:sysClr val="window" lastClr="FFFFFF"/>
+      </a:lt1>
+      <a:dk2>
+        <a:srgbClr val="0E2841"/>
+      </a:dk2>
+      <a:lt2>
+        <a:srgbClr val="E8E8E8"/>
+      </a:lt2>
+      <a:accent1>
+        <a:srgbClr val="156082"/>
+      </a:accent1>
+      <a:accent2>
+        <a:srgbClr val="E97132"/>
+      </a:accent2>
+      <a:accent3>
+        <a:srgbClr val="196B24"/>
+      </a:accent3>
+      <a:accent4>
+        <a:srgbClr val="0F9ED5"/>
+      </a:accent4>
+      <a:accent5>
+        <a:srgbClr val="A02B93"/>
+      </a:accent5>
+      <a:accent6>
+        <a:srgbClr val="4EA72E"/>
+      </a:accent6>
+      <a:hlink>
+        <a:srgbClr val="467886"/>
+      </a:hlink>
+      <a:folHlink>
+        <a:srgbClr val="96607D"/>
+      </a:folHlink>
+    </a:clrScheme>
+    <a:fontScheme name="Office">
+      <a:majorFont>
+        <a:latin typeface="Aptos Display" panose="02110004020202020204"/>
+        <a:ea typeface=""/>
+        <a:cs typeface=""/>
+        <a:font script="Jpan" typeface="游ゴシック Light"/>
+        <a:font script="Hang" typeface="맑은 고딕"/>
+        <a:font script="Hans" typeface="等线 Light"/>
+        <a:font script="Hant" typeface="新細明體"/>
+        <a:font script="Arab" typeface="Times New Roman"/>
+        <a:font script="Hebr" typeface="Times New Roman"/>
+        <a:font script="Thai" typeface="Angsana New"/>
+        <a:font script="Ethi" typeface="Nyala"/>
+        <a:font script="Beng" typeface="Vrinda"/>
+        <a:font script="Gujr" typeface="Shruti"/>
+        <a:font script="Khmr" typeface="MoolBoran"/>
+        <a:font script="Knda" typeface="Tunga"/>
+        <a:font script="Guru" typeface="Raavi"/>
+        <a:font script="Cans" typeface="Euphemia"/>
+        <a:font script="Cher" typeface="Plantagenet Cherokee"/>
+        <a:font script="Yiii" typeface="Microsoft Yi Baiti"/>
+        <a:font script="Tibt" typeface="Microsoft Himalaya"/>
+        <a:font script="Thaa" typeface="MV Boli"/>
+        <a:font script="Deva" typeface="Mangal"/>
+        <a:font script="Telu" typeface="Gautami"/>
+        <a:font script="Taml" typeface="Latha"/>
+        <a:font script="Syrc" typeface="Estrangelo Edessa"/>
+        <a:font script="Orya" typeface="Kalinga"/>
+        <a:font script="Mlym" typeface="Kartika"/>
+        <a:font script="Laoo" typeface="DokChampa"/>
+        <a:font script="Sinh" typeface="Iskoola Pota"/>
+        <a:font script="Mong" typeface="Mongolian Baiti"/>
+        <a:font script="Viet" typeface="Times New Roman"/>
+        <a:font script="Uigh" typeface="Microsoft Uighur"/>
+        <a:font script="Geor" typeface="Sylfaen"/>
+        <a:font script="Armn" typeface="Arial"/>
+        <a:font script="Bugi" typeface="Leelawadee UI"/>
+        <a:font script="Bopo" typeface="Microsoft JhengHei"/>
+        <a:font script="Java" typeface="Javanese Text"/>
+        <a:font script="Lisu" typeface="Segoe UI"/>
+        <a:font script="Mymr" typeface="Myanmar Text"/>
+        <a:font script="Nkoo" typeface="Ebrima"/>
+        <a:font script="Olck" typeface="Nirmala UI"/>
+        <a:font script="Osma" typeface="Ebrima"/>
+        <a:font script="Phag" typeface="Phagspa"/>
+        <a:font script="Syrn" typeface="Estrangelo Edessa"/>
+        <a:font script="Syrj" typeface="Estrangelo Edessa"/>
+        <a:font script="Syre" typeface="Estrangelo Edessa"/>
+        <a:font script="Sora" typeface="Nirmala UI"/>
+        <a:font script="Tale" typeface="Microsoft Tai Le"/>
+        <a:font script="Talu" typeface="Microsoft New Tai Lue"/>
+        <a:font script="Tfng" typeface="Ebrima"/>
+      </a:majorFont>
+      <a:minorFont>
+        <a:latin typeface="Aptos" panose="02110004020202020204"/>
+        <a:ea typeface=""/>
+        <a:cs typeface=""/>
+        <a:font script="Jpan" typeface="游ゴシック"/>
+        <a:font script="Hang" typeface="맑은 고딕"/>
+        <a:font script="Hans" typeface="等线"/>
+        <a:font script="Hant" typeface="新細明體"/>
+        <a:font script="Arab" typeface="Arial"/>
+        <a:font script="Hebr" typeface="Arial"/>
+        <a:font script="Thai" typeface="Cordia New"/>
+        <a:font script="Ethi" typeface="Nyala"/>
+        <a:font script="Beng" typeface="Vrinda"/>
+        <a:font script="Gujr" typeface="Shruti"/>
+        <a:font script="Khmr" typeface="DaunPenh"/>
+        <a:font script="Knda" typeface="Tunga"/>
+        <a:font script="Guru" typeface="Raavi"/>
+        <a:font script="Cans" typeface="Euphemia"/>
+        <a:font script="Cher" typeface="Plantagenet Cherokee"/>
+        <a:font script="Yiii" typeface="Microsoft Yi Baiti"/>
+        <a:font script="Tibt" typeface="Microsoft Himalaya"/>
+        <a:font script="Thaa" typeface="MV Boli"/>
+        <a:font script="Deva" typeface="Mangal"/>
+        <a:font script="Telu" typeface="Gautami"/>
+        <a:font script="Taml" typeface="Latha"/>
+        <a:font script="Syrc" typeface="Estrangelo Edessa"/>
+        <a:font script="Orya" typeface="Kalinga"/>
+        <a:font script="Mlym" typeface="Kartika"/>
+        <a:font script="Laoo" typeface="DokChampa"/>
+        <a:font script="Sinh" typeface="Iskoola Pota"/>
+        <a:font script="Mong" typeface="Mongolian Baiti"/>
+        <a:font script="Viet" typeface="Arial"/>
+        <a:font script="Uigh" typeface="Microsoft Uighur"/>
+        <a:font script="Geor" typeface="Sylfaen"/>
+        <a:font script="Armn" typeface="Arial"/>
+        <a:font script="Bugi" typeface="Leelawadee UI"/>
+        <a:font script="Bopo" typeface="Microsoft JhengHei"/>
+        <a:font script="Java" typeface="Javanese Text"/>
+        <a:font script="Lisu" typeface="Segoe UI"/>
+        <a:font script="Mymr" typeface="Myanmar Text"/>
+        <a:font script="Nkoo" typeface="Ebrima"/>
+        <a:font script="Olck" typeface="Nirmala UI"/>
+        <a:font script="Osma" typeface="Ebrima"/>
+        <a:font script="Phag" typeface="Phagspa"/>
+        <a:font script="Syrn" typeface="Estrangelo Edessa"/>
+        <a:font script="Syrj" typeface="Estrangelo Edessa"/>
+        <a:font script="Syre" typeface="Estrangelo Edessa"/>
+        <a:font script="Sora" typeface="Nirmala UI"/>
+        <a:font script="Tale" typeface="Microsoft Tai Le"/>
+        <a:font script="Talu" typeface="Microsoft New Tai Lue"/>
+        <a:font script="Tfng" typeface="Ebrima"/>
+      </a:minorFont>
+    </a:fontScheme>
+    <a:fmtScheme name="Office">
+      <a:fillStyleLst>
+        <a:solidFill>
+          <a:schemeClr val="phClr"/>
+        </a:solidFill>
+        <a:gradFill rotWithShape="1">
+          <a:gsLst>
+            <a:gs pos="0">
+              <a:schemeClr val="phClr">
+                <a:lumMod val="110000"/>
+                <a:satMod val="105000"/>
+                <a:tint val="67000"/>
+              </a:schemeClr>
+            </a:gs>
+            <a:gs pos="50000">
+              <a:schemeClr val="phClr">
+                <a:lumMod val="105000"/>
+                <a:satMod val="103000"/>
+                <a:tint val="73000"/>
+              </a:schemeClr>
+            </a:gs>
+            <a:gs pos="100000">
+              <a:schemeClr val="phClr">
+                <a:lumMod val="105000"/>
+                <a:satMod val="109000"/>
+                <a:tint val="81000"/>
+              </a:schemeClr>
+            </a:gs>
+          </a:gsLst>
+          <a:lin ang="5400000" scaled="0"/>
+        </a:gradFill>
+        <a:gradFill rotWithShape="1">
+          <a:gsLst>
+            <a:gs pos="0">
+              <a:schemeClr val="phClr">
+                <a:satMod val="103000"/>
+                <a:lumMod val="102000"/>
+                <a:tint val="94000"/>
+              </a:schemeClr>
+            </a:gs>
+            <a:gs pos="50000">
+              <a:schemeClr val="phClr">
+                <a:satMod val="110000"/>
+                <a:lumMod val="100000"/>
+                <a:shade val="100000"/>
+              </a:schemeClr>
+            </a:gs>
+            <a:gs pos="100000">
+              <a:schemeClr val="phClr">
+                <a:lumMod val="99000"/>
+                <a:satMod val="120000"/>
+                <a:shade val="78000"/>
+              </a:schemeClr>
+            </a:gs>
+          </a:gsLst>
+          <a:lin ang="5400000" scaled="0"/>
+        </a:gradFill>
+      </a:fillStyleLst>
+      <a:lnStyleLst>
+        <a:ln w="12700" cap="flat" cmpd="sng" algn="ctr">
+          <a:solidFill>
+            <a:schemeClr val="phClr"/>
+          </a:solidFill>
+          <a:prstDash val="solid"/>
+          <a:miter lim="800000"/>
+        </a:ln>
+        <a:ln w="19050" cap="flat" cmpd="sng" algn="ctr">
+          <a:solidFill>
+            <a:schemeClr val="phClr"/>
+          </a:solidFill>
+          <a:prstDash val="solid"/>
+          <a:miter lim="800000"/>
+        </a:ln>
+        <a:ln w="25400" cap="flat" cmpd="sng" algn="ctr">
+          <a:solidFill>
+            <a:schemeClr val="phClr"/>
+          </a:solidFill>
+          <a:prstDash val="solid"/>
+          <a:miter lim="800000"/>
+        </a:ln>
+      </a:lnStyleLst>
+      <a:effectStyleLst>
+        <a:effectStyle>
+          <a:effectLst/>
+        </a:effectStyle>
+        <a:effectStyle>
+          <a:effectLst/>
+        </a:effectStyle>
+        <a:effectStyle>
+          <a:effectLst>
+            <a:outerShdw blurRad="57150" dist="19050" dir="5400000" algn="ctr" rotWithShape="0">
+              <a:srgbClr val="000000">
+                <a:alpha val="63000"/>
+              </a:srgbClr>
+            </a:outerShdw>
+          </a:effectLst>
+        </a:effectStyle>
+      </a:effectStyleLst>
+      <a:bgFillStyleLst>
+        <a:solidFill>
+          <a:schemeClr val="phClr"/>
+        </a:solidFill>
+        <a:solidFill>
+          <a:schemeClr val="phClr">
+            <a:tint val="95000"/>
+            <a:satMod val="170000"/>
+          </a:schemeClr>
+        </a:solidFill>
+        <a:gradFill rotWithShape="1">
+          <a:gsLst>
+            <a:gs pos="0">
+              <a:schemeClr val="phClr">
+                <a:tint val="93000"/>
+                <a:satMod val="150000"/>
+                <a:shade val="98000"/>
+                <a:lumMod val="102000"/>
+              </a:schemeClr>
+            </a:gs>
+            <a:gs pos="50000">
+              <a:schemeClr val="phClr">
+                <a:tint val="98000"/>
+                <a:satMod val="130000"/>
+                <a:shade val="90000"/>
+                <a:lumMod val="103000"/>
+              </a:schemeClr>
+            </a:gs>
+            <a:gs pos="100000">
+              <a:schemeClr val="phClr">
+                <a:shade val="63000"/>
+                <a:satMod val="120000"/>
+              </a:schemeClr>
+            </a:gs>
+          </a:gsLst>
+          <a:lin ang="5400000" scaled="0"/>
+        </a:gradFill>
+      </a:bgFillStyleLst>
+    </a:fmtScheme>
+  </a:themeElements>
+  <a:objectDefaults>
+    <a:lnDef>
+      <a:spPr/>
+      <a:bodyPr/>
+      <a:lstStyle/>
+      <a:style>
+        <a:lnRef idx="2">
+          <a:schemeClr val="accent1"/>
+        </a:lnRef>
+        <a:fillRef idx="0">
+          <a:schemeClr val="accent1"/>
+        </a:fillRef>
+        <a:effectRef idx="1">
+          <a:schemeClr val="accent1"/>
+        </a:effectRef>
+        <a:fontRef idx="minor">
+          <a:schemeClr val="tx1"/>
+        </a:fontRef>
+      </a:style>
+    </a:lnDef>
+  </a:objectDefaults>
+  <a:extraClrSchemeLst/>
+  <a:extLst>
+    <a:ext uri="{05A4C25C-085E-4340-85A3-A5531E510DB2}">
+      <thm15:themeFamily xmlns:thm15="http://schemas.microsoft.com/office/thememl/2012/main" name="Office Theme" id="{2E142A2C-CD16-42D6-873A-C26D2A0506FA}" vid="{1BDDFF52-6CD6-40A5-AB3C-68EB2F1E4D0A}"/>
+    </a:ext>
+  </a:extLst>
+</a:theme>
 </file>